--- a/docs/pptx/entire/ritu-entire-linsubhr-sens-anemia3_10pct.pptx
+++ b/docs/pptx/entire/ritu-entire-linsubhr-sens-anemia3_10pct.pptx
@@ -3389,612 +3389,612 @@
           </p:nvSpPr>
           <p:spPr>
             <a:xfrm>
-              <a:off x="1172049" y="3161258"/>
-              <a:ext cx="7090630" cy="2195172"/>
+              <a:off x="1172049" y="3156006"/>
+              <a:ext cx="7090630" cy="2201011"/>
             </a:xfrm>
             <a:custGeom>
               <a:avLst/>
               <a:pathLst>
-                <a:path w="7090630" h="2195172">
+                <a:path w="7090630" h="2201011">
                   <a:moveTo>
                     <a:pt x="0" y="0"/>
                   </a:moveTo>
                   <a:lnTo>
-                    <a:pt x="71622" y="59255"/>
-                  </a:lnTo>
-                  <a:lnTo>
-                    <a:pt x="143245" y="117044"/>
-                  </a:lnTo>
-                  <a:lnTo>
-                    <a:pt x="214867" y="173405"/>
-                  </a:lnTo>
-                  <a:lnTo>
-                    <a:pt x="286490" y="228372"/>
-                  </a:lnTo>
-                  <a:lnTo>
-                    <a:pt x="358112" y="281979"/>
-                  </a:lnTo>
-                  <a:lnTo>
-                    <a:pt x="429735" y="334260"/>
-                  </a:lnTo>
-                  <a:lnTo>
-                    <a:pt x="501357" y="385249"/>
-                  </a:lnTo>
-                  <a:lnTo>
-                    <a:pt x="572980" y="434977"/>
-                  </a:lnTo>
-                  <a:lnTo>
-                    <a:pt x="644602" y="483474"/>
-                  </a:lnTo>
-                  <a:lnTo>
-                    <a:pt x="716225" y="530773"/>
-                  </a:lnTo>
-                  <a:lnTo>
-                    <a:pt x="787847" y="576901"/>
-                  </a:lnTo>
-                  <a:lnTo>
-                    <a:pt x="859470" y="621889"/>
-                  </a:lnTo>
-                  <a:lnTo>
-                    <a:pt x="931092" y="665764"/>
-                  </a:lnTo>
-                  <a:lnTo>
-                    <a:pt x="1002715" y="708555"/>
-                  </a:lnTo>
-                  <a:lnTo>
-                    <a:pt x="1074337" y="750286"/>
-                  </a:lnTo>
-                  <a:lnTo>
-                    <a:pt x="1145960" y="790986"/>
-                  </a:lnTo>
-                  <a:lnTo>
-                    <a:pt x="1217582" y="830680"/>
-                  </a:lnTo>
-                  <a:lnTo>
-                    <a:pt x="1289205" y="869391"/>
-                  </a:lnTo>
-                  <a:lnTo>
-                    <a:pt x="1360827" y="907145"/>
-                  </a:lnTo>
-                  <a:lnTo>
-                    <a:pt x="1432450" y="943966"/>
-                  </a:lnTo>
-                  <a:lnTo>
-                    <a:pt x="1504073" y="979876"/>
-                  </a:lnTo>
-                  <a:lnTo>
-                    <a:pt x="1575695" y="1014898"/>
-                  </a:lnTo>
-                  <a:lnTo>
-                    <a:pt x="1647318" y="1049054"/>
-                  </a:lnTo>
-                  <a:lnTo>
-                    <a:pt x="1718940" y="1082365"/>
-                  </a:lnTo>
-                  <a:lnTo>
-                    <a:pt x="1790563" y="1114852"/>
-                  </a:lnTo>
-                  <a:lnTo>
-                    <a:pt x="1862185" y="1146536"/>
-                  </a:lnTo>
-                  <a:lnTo>
-                    <a:pt x="1933808" y="1177436"/>
-                  </a:lnTo>
-                  <a:lnTo>
-                    <a:pt x="2005430" y="1207572"/>
-                  </a:lnTo>
-                  <a:lnTo>
-                    <a:pt x="2077053" y="1236963"/>
-                  </a:lnTo>
-                  <a:lnTo>
-                    <a:pt x="2148675" y="1265627"/>
-                  </a:lnTo>
-                  <a:lnTo>
-                    <a:pt x="2220298" y="1293582"/>
-                  </a:lnTo>
-                  <a:lnTo>
-                    <a:pt x="2291920" y="1320845"/>
-                  </a:lnTo>
-                  <a:lnTo>
-                    <a:pt x="2363543" y="1347435"/>
-                  </a:lnTo>
-                  <a:lnTo>
-                    <a:pt x="2435165" y="1373366"/>
-                  </a:lnTo>
-                  <a:lnTo>
-                    <a:pt x="2506788" y="1398657"/>
-                  </a:lnTo>
-                  <a:lnTo>
-                    <a:pt x="2578410" y="1423322"/>
-                  </a:lnTo>
-                  <a:lnTo>
-                    <a:pt x="2650033" y="1447377"/>
-                  </a:lnTo>
-                  <a:lnTo>
-                    <a:pt x="2721655" y="1470837"/>
-                  </a:lnTo>
-                  <a:lnTo>
-                    <a:pt x="2793278" y="1493717"/>
-                  </a:lnTo>
-                  <a:lnTo>
-                    <a:pt x="2864901" y="1516031"/>
-                  </a:lnTo>
-                  <a:lnTo>
-                    <a:pt x="2936523" y="1537793"/>
-                  </a:lnTo>
-                  <a:lnTo>
-                    <a:pt x="3008146" y="1559017"/>
-                  </a:lnTo>
-                  <a:lnTo>
-                    <a:pt x="3079768" y="1569551"/>
-                  </a:lnTo>
-                  <a:lnTo>
-                    <a:pt x="3151391" y="1574253"/>
-                  </a:lnTo>
-                  <a:lnTo>
-                    <a:pt x="3223013" y="1578927"/>
-                  </a:lnTo>
-                  <a:lnTo>
-                    <a:pt x="3294636" y="1583576"/>
-                  </a:lnTo>
-                  <a:lnTo>
-                    <a:pt x="3366258" y="1588198"/>
-                  </a:lnTo>
-                  <a:lnTo>
-                    <a:pt x="3437881" y="1592793"/>
-                  </a:lnTo>
-                  <a:lnTo>
-                    <a:pt x="3509503" y="1597362"/>
-                  </a:lnTo>
-                  <a:lnTo>
-                    <a:pt x="3581126" y="1601906"/>
-                  </a:lnTo>
-                  <a:lnTo>
-                    <a:pt x="3652748" y="1606423"/>
-                  </a:lnTo>
-                  <a:lnTo>
-                    <a:pt x="3724371" y="1610915"/>
-                  </a:lnTo>
-                  <a:lnTo>
-                    <a:pt x="3795993" y="1615381"/>
-                  </a:lnTo>
-                  <a:lnTo>
-                    <a:pt x="3867616" y="1619822"/>
-                  </a:lnTo>
-                  <a:lnTo>
-                    <a:pt x="3939238" y="1624238"/>
-                  </a:lnTo>
-                  <a:lnTo>
-                    <a:pt x="4010861" y="1628628"/>
-                  </a:lnTo>
-                  <a:lnTo>
-                    <a:pt x="4082483" y="1632994"/>
-                  </a:lnTo>
-                  <a:lnTo>
-                    <a:pt x="4154106" y="1637334"/>
-                  </a:lnTo>
-                  <a:lnTo>
-                    <a:pt x="4225729" y="1641650"/>
-                  </a:lnTo>
-                  <a:lnTo>
-                    <a:pt x="4297351" y="1645942"/>
-                  </a:lnTo>
-                  <a:lnTo>
-                    <a:pt x="4368974" y="1650209"/>
-                  </a:lnTo>
-                  <a:lnTo>
-                    <a:pt x="4440596" y="1654451"/>
-                  </a:lnTo>
-                  <a:lnTo>
-                    <a:pt x="4512219" y="1658670"/>
-                  </a:lnTo>
-                  <a:lnTo>
-                    <a:pt x="4583841" y="1662865"/>
-                  </a:lnTo>
-                  <a:lnTo>
-                    <a:pt x="4655464" y="1667035"/>
-                  </a:lnTo>
-                  <a:lnTo>
-                    <a:pt x="4727086" y="1671182"/>
-                  </a:lnTo>
-                  <a:lnTo>
-                    <a:pt x="4798709" y="1675306"/>
-                  </a:lnTo>
-                  <a:lnTo>
-                    <a:pt x="4870331" y="1679406"/>
-                  </a:lnTo>
-                  <a:lnTo>
-                    <a:pt x="4941954" y="1683482"/>
-                  </a:lnTo>
-                  <a:lnTo>
-                    <a:pt x="5013576" y="1687536"/>
-                  </a:lnTo>
-                  <a:lnTo>
-                    <a:pt x="5085199" y="1691566"/>
-                  </a:lnTo>
-                  <a:lnTo>
-                    <a:pt x="5156821" y="1695573"/>
-                  </a:lnTo>
-                  <a:lnTo>
-                    <a:pt x="5228444" y="1699558"/>
-                  </a:lnTo>
-                  <a:lnTo>
-                    <a:pt x="5300066" y="1703520"/>
-                  </a:lnTo>
-                  <a:lnTo>
-                    <a:pt x="5371689" y="1707459"/>
-                  </a:lnTo>
-                  <a:lnTo>
-                    <a:pt x="5443311" y="1711377"/>
-                  </a:lnTo>
-                  <a:lnTo>
-                    <a:pt x="5514934" y="1715271"/>
-                  </a:lnTo>
-                  <a:lnTo>
-                    <a:pt x="5586557" y="1719144"/>
-                  </a:lnTo>
-                  <a:lnTo>
-                    <a:pt x="5658179" y="1722994"/>
-                  </a:lnTo>
-                  <a:lnTo>
-                    <a:pt x="5729802" y="1726823"/>
-                  </a:lnTo>
-                  <a:lnTo>
-                    <a:pt x="5801424" y="1730630"/>
-                  </a:lnTo>
-                  <a:lnTo>
-                    <a:pt x="5873047" y="1734415"/>
-                  </a:lnTo>
-                  <a:lnTo>
-                    <a:pt x="5944669" y="1738179"/>
-                  </a:lnTo>
-                  <a:lnTo>
-                    <a:pt x="6016292" y="1741921"/>
-                  </a:lnTo>
-                  <a:lnTo>
-                    <a:pt x="6087914" y="1745642"/>
-                  </a:lnTo>
-                  <a:lnTo>
-                    <a:pt x="6159537" y="1749342"/>
-                  </a:lnTo>
-                  <a:lnTo>
-                    <a:pt x="6231159" y="1753021"/>
-                  </a:lnTo>
-                  <a:lnTo>
-                    <a:pt x="6302782" y="1756678"/>
-                  </a:lnTo>
-                  <a:lnTo>
-                    <a:pt x="6374404" y="1760315"/>
-                  </a:lnTo>
-                  <a:lnTo>
-                    <a:pt x="6446027" y="1763932"/>
-                  </a:lnTo>
-                  <a:lnTo>
-                    <a:pt x="6517649" y="1767527"/>
-                  </a:lnTo>
-                  <a:lnTo>
-                    <a:pt x="6589272" y="1771103"/>
-                  </a:lnTo>
-                  <a:lnTo>
-                    <a:pt x="6660894" y="1774658"/>
-                  </a:lnTo>
-                  <a:lnTo>
-                    <a:pt x="6732517" y="1778192"/>
-                  </a:lnTo>
-                  <a:lnTo>
-                    <a:pt x="6804139" y="1781707"/>
-                  </a:lnTo>
-                  <a:lnTo>
-                    <a:pt x="6875762" y="1785202"/>
-                  </a:lnTo>
-                  <a:lnTo>
-                    <a:pt x="6947385" y="1788676"/>
-                  </a:lnTo>
-                  <a:lnTo>
-                    <a:pt x="7019007" y="1792131"/>
-                  </a:lnTo>
-                  <a:lnTo>
-                    <a:pt x="7090630" y="1795567"/>
-                  </a:lnTo>
-                  <a:lnTo>
-                    <a:pt x="7090630" y="2195172"/>
-                  </a:lnTo>
-                  <a:lnTo>
-                    <a:pt x="7019007" y="2190080"/>
-                  </a:lnTo>
-                  <a:lnTo>
-                    <a:pt x="6947385" y="2184858"/>
-                  </a:lnTo>
-                  <a:lnTo>
-                    <a:pt x="6875762" y="2179504"/>
-                  </a:lnTo>
-                  <a:lnTo>
-                    <a:pt x="6804139" y="2174015"/>
-                  </a:lnTo>
-                  <a:lnTo>
-                    <a:pt x="6732517" y="2168386"/>
-                  </a:lnTo>
-                  <a:lnTo>
-                    <a:pt x="6660894" y="2162614"/>
-                  </a:lnTo>
-                  <a:lnTo>
-                    <a:pt x="6589272" y="2156696"/>
-                  </a:lnTo>
-                  <a:lnTo>
-                    <a:pt x="6517649" y="2150628"/>
-                  </a:lnTo>
-                  <a:lnTo>
-                    <a:pt x="6446027" y="2144406"/>
-                  </a:lnTo>
-                  <a:lnTo>
-                    <a:pt x="6374404" y="2138026"/>
-                  </a:lnTo>
-                  <a:lnTo>
-                    <a:pt x="6302782" y="2131485"/>
-                  </a:lnTo>
-                  <a:lnTo>
-                    <a:pt x="6231159" y="2124777"/>
-                  </a:lnTo>
-                  <a:lnTo>
-                    <a:pt x="6159537" y="2117900"/>
-                  </a:lnTo>
-                  <a:lnTo>
-                    <a:pt x="6087914" y="2110848"/>
-                  </a:lnTo>
-                  <a:lnTo>
-                    <a:pt x="6016292" y="2103617"/>
-                  </a:lnTo>
-                  <a:lnTo>
-                    <a:pt x="5944669" y="2096203"/>
-                  </a:lnTo>
-                  <a:lnTo>
-                    <a:pt x="5873047" y="2088601"/>
-                  </a:lnTo>
-                  <a:lnTo>
-                    <a:pt x="5801424" y="2080807"/>
-                  </a:lnTo>
-                  <a:lnTo>
-                    <a:pt x="5729802" y="2072814"/>
-                  </a:lnTo>
-                  <a:lnTo>
-                    <a:pt x="5658179" y="2064619"/>
-                  </a:lnTo>
-                  <a:lnTo>
-                    <a:pt x="5586557" y="2056216"/>
-                  </a:lnTo>
-                  <a:lnTo>
-                    <a:pt x="5514934" y="2047600"/>
-                  </a:lnTo>
-                  <a:lnTo>
-                    <a:pt x="5443311" y="2038765"/>
-                  </a:lnTo>
-                  <a:lnTo>
-                    <a:pt x="5371689" y="2029707"/>
-                  </a:lnTo>
-                  <a:lnTo>
-                    <a:pt x="5300066" y="2020419"/>
-                  </a:lnTo>
-                  <a:lnTo>
-                    <a:pt x="5228444" y="2010895"/>
-                  </a:lnTo>
-                  <a:lnTo>
-                    <a:pt x="5156821" y="2001129"/>
-                  </a:lnTo>
-                  <a:lnTo>
-                    <a:pt x="5085199" y="1991117"/>
-                  </a:lnTo>
-                  <a:lnTo>
-                    <a:pt x="5013576" y="1980850"/>
-                  </a:lnTo>
-                  <a:lnTo>
-                    <a:pt x="4941954" y="1970322"/>
-                  </a:lnTo>
-                  <a:lnTo>
-                    <a:pt x="4870331" y="1959528"/>
-                  </a:lnTo>
-                  <a:lnTo>
-                    <a:pt x="4798709" y="1948460"/>
-                  </a:lnTo>
-                  <a:lnTo>
-                    <a:pt x="4727086" y="1937112"/>
-                  </a:lnTo>
-                  <a:lnTo>
-                    <a:pt x="4655464" y="1925476"/>
-                  </a:lnTo>
-                  <a:lnTo>
-                    <a:pt x="4583841" y="1913544"/>
-                  </a:lnTo>
-                  <a:lnTo>
-                    <a:pt x="4512219" y="1901310"/>
-                  </a:lnTo>
-                  <a:lnTo>
-                    <a:pt x="4440596" y="1888766"/>
-                  </a:lnTo>
-                  <a:lnTo>
-                    <a:pt x="4368974" y="1875904"/>
-                  </a:lnTo>
-                  <a:lnTo>
-                    <a:pt x="4297351" y="1862716"/>
-                  </a:lnTo>
-                  <a:lnTo>
-                    <a:pt x="4225729" y="1849193"/>
-                  </a:lnTo>
-                  <a:lnTo>
-                    <a:pt x="4154106" y="1835327"/>
-                  </a:lnTo>
-                  <a:lnTo>
-                    <a:pt x="4082483" y="1821110"/>
-                  </a:lnTo>
-                  <a:lnTo>
-                    <a:pt x="4010861" y="1806532"/>
-                  </a:lnTo>
-                  <a:lnTo>
-                    <a:pt x="3939238" y="1791584"/>
-                  </a:lnTo>
-                  <a:lnTo>
-                    <a:pt x="3867616" y="1776257"/>
-                  </a:lnTo>
-                  <a:lnTo>
-                    <a:pt x="3795993" y="1760542"/>
-                  </a:lnTo>
-                  <a:lnTo>
-                    <a:pt x="3724371" y="1744428"/>
-                  </a:lnTo>
-                  <a:lnTo>
-                    <a:pt x="3652748" y="1727906"/>
-                  </a:lnTo>
-                  <a:lnTo>
-                    <a:pt x="3581126" y="1710965"/>
-                  </a:lnTo>
-                  <a:lnTo>
-                    <a:pt x="3509503" y="1693594"/>
-                  </a:lnTo>
-                  <a:lnTo>
-                    <a:pt x="3437881" y="1675782"/>
-                  </a:lnTo>
-                  <a:lnTo>
-                    <a:pt x="3366258" y="1657519"/>
-                  </a:lnTo>
-                  <a:lnTo>
-                    <a:pt x="3294636" y="1638793"/>
-                  </a:lnTo>
-                  <a:lnTo>
-                    <a:pt x="3223013" y="1619592"/>
-                  </a:lnTo>
-                  <a:lnTo>
-                    <a:pt x="3151391" y="1599904"/>
-                  </a:lnTo>
-                  <a:lnTo>
-                    <a:pt x="3079768" y="1579717"/>
-                  </a:lnTo>
-                  <a:lnTo>
-                    <a:pt x="3008146" y="1564823"/>
-                  </a:lnTo>
-                  <a:lnTo>
-                    <a:pt x="2936523" y="1560067"/>
-                  </a:lnTo>
-                  <a:lnTo>
-                    <a:pt x="2864901" y="1555284"/>
-                  </a:lnTo>
-                  <a:lnTo>
-                    <a:pt x="2793278" y="1550474"/>
-                  </a:lnTo>
-                  <a:lnTo>
-                    <a:pt x="2721655" y="1545637"/>
-                  </a:lnTo>
-                  <a:lnTo>
-                    <a:pt x="2650033" y="1540771"/>
-                  </a:lnTo>
-                  <a:lnTo>
-                    <a:pt x="2578410" y="1535878"/>
-                  </a:lnTo>
-                  <a:lnTo>
-                    <a:pt x="2506788" y="1530957"/>
-                  </a:lnTo>
-                  <a:lnTo>
-                    <a:pt x="2435165" y="1526008"/>
-                  </a:lnTo>
-                  <a:lnTo>
-                    <a:pt x="2363543" y="1521030"/>
-                  </a:lnTo>
-                  <a:lnTo>
-                    <a:pt x="2291920" y="1516024"/>
-                  </a:lnTo>
-                  <a:lnTo>
-                    <a:pt x="2220298" y="1510989"/>
-                  </a:lnTo>
-                  <a:lnTo>
-                    <a:pt x="2148675" y="1505926"/>
-                  </a:lnTo>
-                  <a:lnTo>
-                    <a:pt x="2077053" y="1500833"/>
-                  </a:lnTo>
-                  <a:lnTo>
-                    <a:pt x="2005430" y="1495712"/>
-                  </a:lnTo>
-                  <a:lnTo>
-                    <a:pt x="1933808" y="1490561"/>
-                  </a:lnTo>
-                  <a:lnTo>
-                    <a:pt x="1862185" y="1485380"/>
-                  </a:lnTo>
-                  <a:lnTo>
-                    <a:pt x="1790563" y="1480170"/>
-                  </a:lnTo>
-                  <a:lnTo>
-                    <a:pt x="1718940" y="1474930"/>
-                  </a:lnTo>
-                  <a:lnTo>
-                    <a:pt x="1647318" y="1469661"/>
-                  </a:lnTo>
-                  <a:lnTo>
-                    <a:pt x="1575695" y="1464361"/>
-                  </a:lnTo>
-                  <a:lnTo>
-                    <a:pt x="1504073" y="1459030"/>
-                  </a:lnTo>
-                  <a:lnTo>
-                    <a:pt x="1432450" y="1453669"/>
-                  </a:lnTo>
-                  <a:lnTo>
-                    <a:pt x="1360827" y="1448278"/>
-                  </a:lnTo>
-                  <a:lnTo>
-                    <a:pt x="1289205" y="1442856"/>
-                  </a:lnTo>
-                  <a:lnTo>
-                    <a:pt x="1217582" y="1437402"/>
-                  </a:lnTo>
-                  <a:lnTo>
-                    <a:pt x="1145960" y="1431918"/>
-                  </a:lnTo>
-                  <a:lnTo>
-                    <a:pt x="1074337" y="1426402"/>
-                  </a:lnTo>
-                  <a:lnTo>
-                    <a:pt x="1002715" y="1420854"/>
-                  </a:lnTo>
-                  <a:lnTo>
-                    <a:pt x="931092" y="1415275"/>
-                  </a:lnTo>
-                  <a:lnTo>
-                    <a:pt x="859470" y="1409664"/>
-                  </a:lnTo>
-                  <a:lnTo>
-                    <a:pt x="787847" y="1404021"/>
-                  </a:lnTo>
-                  <a:lnTo>
-                    <a:pt x="716225" y="1398345"/>
-                  </a:lnTo>
-                  <a:lnTo>
-                    <a:pt x="644602" y="1392637"/>
-                  </a:lnTo>
-                  <a:lnTo>
-                    <a:pt x="572980" y="1386896"/>
-                  </a:lnTo>
-                  <a:lnTo>
-                    <a:pt x="501357" y="1381123"/>
-                  </a:lnTo>
-                  <a:lnTo>
-                    <a:pt x="429735" y="1375316"/>
-                  </a:lnTo>
-                  <a:lnTo>
-                    <a:pt x="358112" y="1369476"/>
-                  </a:lnTo>
-                  <a:lnTo>
-                    <a:pt x="286490" y="1363603"/>
-                  </a:lnTo>
-                  <a:lnTo>
-                    <a:pt x="214867" y="1357696"/>
-                  </a:lnTo>
-                  <a:lnTo>
-                    <a:pt x="143245" y="1351756"/>
-                  </a:lnTo>
-                  <a:lnTo>
-                    <a:pt x="71622" y="1345781"/>
-                  </a:lnTo>
-                  <a:lnTo>
-                    <a:pt x="0" y="1339772"/>
+                    <a:pt x="71622" y="59506"/>
+                  </a:lnTo>
+                  <a:lnTo>
+                    <a:pt x="143245" y="117537"/>
+                  </a:lnTo>
+                  <a:lnTo>
+                    <a:pt x="214867" y="174130"/>
+                  </a:lnTo>
+                  <a:lnTo>
+                    <a:pt x="286490" y="229321"/>
+                  </a:lnTo>
+                  <a:lnTo>
+                    <a:pt x="358112" y="283144"/>
+                  </a:lnTo>
+                  <a:lnTo>
+                    <a:pt x="429735" y="335634"/>
+                  </a:lnTo>
+                  <a:lnTo>
+                    <a:pt x="501357" y="386822"/>
+                  </a:lnTo>
+                  <a:lnTo>
+                    <a:pt x="572980" y="436742"/>
+                  </a:lnTo>
+                  <a:lnTo>
+                    <a:pt x="644602" y="485425"/>
+                  </a:lnTo>
+                  <a:lnTo>
+                    <a:pt x="716225" y="532902"/>
+                  </a:lnTo>
+                  <a:lnTo>
+                    <a:pt x="787847" y="579202"/>
+                  </a:lnTo>
+                  <a:lnTo>
+                    <a:pt x="859470" y="624355"/>
+                  </a:lnTo>
+                  <a:lnTo>
+                    <a:pt x="931092" y="668388"/>
+                  </a:lnTo>
+                  <a:lnTo>
+                    <a:pt x="1002715" y="711331"/>
+                  </a:lnTo>
+                  <a:lnTo>
+                    <a:pt x="1074337" y="753209"/>
+                  </a:lnTo>
+                  <a:lnTo>
+                    <a:pt x="1145960" y="794050"/>
+                  </a:lnTo>
+                  <a:lnTo>
+                    <a:pt x="1217582" y="833878"/>
+                  </a:lnTo>
+                  <a:lnTo>
+                    <a:pt x="1289205" y="872720"/>
+                  </a:lnTo>
+                  <a:lnTo>
+                    <a:pt x="1360827" y="910598"/>
+                  </a:lnTo>
+                  <a:lnTo>
+                    <a:pt x="1432450" y="947539"/>
+                  </a:lnTo>
+                  <a:lnTo>
+                    <a:pt x="1504073" y="983563"/>
+                  </a:lnTo>
+                  <a:lnTo>
+                    <a:pt x="1575695" y="1018695"/>
+                  </a:lnTo>
+                  <a:lnTo>
+                    <a:pt x="1647318" y="1052957"/>
+                  </a:lnTo>
+                  <a:lnTo>
+                    <a:pt x="1718940" y="1086369"/>
+                  </a:lnTo>
+                  <a:lnTo>
+                    <a:pt x="1790563" y="1118954"/>
+                  </a:lnTo>
+                  <a:lnTo>
+                    <a:pt x="1862185" y="1150730"/>
+                  </a:lnTo>
+                  <a:lnTo>
+                    <a:pt x="1933808" y="1181720"/>
+                  </a:lnTo>
+                  <a:lnTo>
+                    <a:pt x="2005430" y="1211941"/>
+                  </a:lnTo>
+                  <a:lnTo>
+                    <a:pt x="2077053" y="1241414"/>
+                  </a:lnTo>
+                  <a:lnTo>
+                    <a:pt x="2148675" y="1270156"/>
+                  </a:lnTo>
+                  <a:lnTo>
+                    <a:pt x="2220298" y="1298186"/>
+                  </a:lnTo>
+                  <a:lnTo>
+                    <a:pt x="2291920" y="1325521"/>
+                  </a:lnTo>
+                  <a:lnTo>
+                    <a:pt x="2363543" y="1352179"/>
+                  </a:lnTo>
+                  <a:lnTo>
+                    <a:pt x="2435165" y="1378176"/>
+                  </a:lnTo>
+                  <a:lnTo>
+                    <a:pt x="2506788" y="1403529"/>
+                  </a:lnTo>
+                  <a:lnTo>
+                    <a:pt x="2578410" y="1428254"/>
+                  </a:lnTo>
+                  <a:lnTo>
+                    <a:pt x="2650033" y="1452366"/>
+                  </a:lnTo>
+                  <a:lnTo>
+                    <a:pt x="2721655" y="1475880"/>
+                  </a:lnTo>
+                  <a:lnTo>
+                    <a:pt x="2793278" y="1498812"/>
+                  </a:lnTo>
+                  <a:lnTo>
+                    <a:pt x="2864901" y="1521176"/>
+                  </a:lnTo>
+                  <a:lnTo>
+                    <a:pt x="2936523" y="1542985"/>
+                  </a:lnTo>
+                  <a:lnTo>
+                    <a:pt x="3008146" y="1564254"/>
+                  </a:lnTo>
+                  <a:lnTo>
+                    <a:pt x="3079768" y="1574831"/>
+                  </a:lnTo>
+                  <a:lnTo>
+                    <a:pt x="3151391" y="1579576"/>
+                  </a:lnTo>
+                  <a:lnTo>
+                    <a:pt x="3223013" y="1584294"/>
+                  </a:lnTo>
+                  <a:lnTo>
+                    <a:pt x="3294636" y="1588985"/>
+                  </a:lnTo>
+                  <a:lnTo>
+                    <a:pt x="3366258" y="1593649"/>
+                  </a:lnTo>
+                  <a:lnTo>
+                    <a:pt x="3437881" y="1598286"/>
+                  </a:lnTo>
+                  <a:lnTo>
+                    <a:pt x="3509503" y="1602896"/>
+                  </a:lnTo>
+                  <a:lnTo>
+                    <a:pt x="3581126" y="1607480"/>
+                  </a:lnTo>
+                  <a:lnTo>
+                    <a:pt x="3652748" y="1612038"/>
+                  </a:lnTo>
+                  <a:lnTo>
+                    <a:pt x="3724371" y="1616569"/>
+                  </a:lnTo>
+                  <a:lnTo>
+                    <a:pt x="3795993" y="1621075"/>
+                  </a:lnTo>
+                  <a:lnTo>
+                    <a:pt x="3867616" y="1625555"/>
+                  </a:lnTo>
+                  <a:lnTo>
+                    <a:pt x="3939238" y="1630008"/>
+                  </a:lnTo>
+                  <a:lnTo>
+                    <a:pt x="4010861" y="1634437"/>
+                  </a:lnTo>
+                  <a:lnTo>
+                    <a:pt x="4082483" y="1638840"/>
+                  </a:lnTo>
+                  <a:lnTo>
+                    <a:pt x="4154106" y="1643217"/>
+                  </a:lnTo>
+                  <a:lnTo>
+                    <a:pt x="4225729" y="1647570"/>
+                  </a:lnTo>
+                  <a:lnTo>
+                    <a:pt x="4297351" y="1651897"/>
+                  </a:lnTo>
+                  <a:lnTo>
+                    <a:pt x="4368974" y="1656200"/>
+                  </a:lnTo>
+                  <a:lnTo>
+                    <a:pt x="4440596" y="1660478"/>
+                  </a:lnTo>
+                  <a:lnTo>
+                    <a:pt x="4512219" y="1664731"/>
+                  </a:lnTo>
+                  <a:lnTo>
+                    <a:pt x="4583841" y="1668960"/>
+                  </a:lnTo>
+                  <a:lnTo>
+                    <a:pt x="4655464" y="1673165"/>
+                  </a:lnTo>
+                  <a:lnTo>
+                    <a:pt x="4727086" y="1677345"/>
+                  </a:lnTo>
+                  <a:lnTo>
+                    <a:pt x="4798709" y="1681502"/>
+                  </a:lnTo>
+                  <a:lnTo>
+                    <a:pt x="4870331" y="1685635"/>
+                  </a:lnTo>
+                  <a:lnTo>
+                    <a:pt x="4941954" y="1689743"/>
+                  </a:lnTo>
+                  <a:lnTo>
+                    <a:pt x="5013576" y="1693829"/>
+                  </a:lnTo>
+                  <a:lnTo>
+                    <a:pt x="5085199" y="1697891"/>
+                  </a:lnTo>
+                  <a:lnTo>
+                    <a:pt x="5156821" y="1701929"/>
+                  </a:lnTo>
+                  <a:lnTo>
+                    <a:pt x="5228444" y="1705945"/>
+                  </a:lnTo>
+                  <a:lnTo>
+                    <a:pt x="5300066" y="1709937"/>
+                  </a:lnTo>
+                  <a:lnTo>
+                    <a:pt x="5371689" y="1713906"/>
+                  </a:lnTo>
+                  <a:lnTo>
+                    <a:pt x="5443311" y="1717853"/>
+                  </a:lnTo>
+                  <a:lnTo>
+                    <a:pt x="5514934" y="1721777"/>
+                  </a:lnTo>
+                  <a:lnTo>
+                    <a:pt x="5586557" y="1725678"/>
+                  </a:lnTo>
+                  <a:lnTo>
+                    <a:pt x="5658179" y="1729557"/>
+                  </a:lnTo>
+                  <a:lnTo>
+                    <a:pt x="5729802" y="1733414"/>
+                  </a:lnTo>
+                  <a:lnTo>
+                    <a:pt x="5801424" y="1737248"/>
+                  </a:lnTo>
+                  <a:lnTo>
+                    <a:pt x="5873047" y="1741061"/>
+                  </a:lnTo>
+                  <a:lnTo>
+                    <a:pt x="5944669" y="1744852"/>
+                  </a:lnTo>
+                  <a:lnTo>
+                    <a:pt x="6016292" y="1748621"/>
+                  </a:lnTo>
+                  <a:lnTo>
+                    <a:pt x="6087914" y="1752368"/>
+                  </a:lnTo>
+                  <a:lnTo>
+                    <a:pt x="6159537" y="1756094"/>
+                  </a:lnTo>
+                  <a:lnTo>
+                    <a:pt x="6231159" y="1759798"/>
+                  </a:lnTo>
+                  <a:lnTo>
+                    <a:pt x="6302782" y="1763481"/>
+                  </a:lnTo>
+                  <a:lnTo>
+                    <a:pt x="6374404" y="1767143"/>
+                  </a:lnTo>
+                  <a:lnTo>
+                    <a:pt x="6446027" y="1770784"/>
+                  </a:lnTo>
+                  <a:lnTo>
+                    <a:pt x="6517649" y="1774404"/>
+                  </a:lnTo>
+                  <a:lnTo>
+                    <a:pt x="6589272" y="1778003"/>
+                  </a:lnTo>
+                  <a:lnTo>
+                    <a:pt x="6660894" y="1781582"/>
+                  </a:lnTo>
+                  <a:lnTo>
+                    <a:pt x="6732517" y="1785140"/>
+                  </a:lnTo>
+                  <a:lnTo>
+                    <a:pt x="6804139" y="1788677"/>
+                  </a:lnTo>
+                  <a:lnTo>
+                    <a:pt x="6875762" y="1792195"/>
+                  </a:lnTo>
+                  <a:lnTo>
+                    <a:pt x="6947385" y="1795692"/>
+                  </a:lnTo>
+                  <a:lnTo>
+                    <a:pt x="7019007" y="1799169"/>
+                  </a:lnTo>
+                  <a:lnTo>
+                    <a:pt x="7090630" y="1802626"/>
+                  </a:lnTo>
+                  <a:lnTo>
+                    <a:pt x="7090630" y="2201011"/>
+                  </a:lnTo>
+                  <a:lnTo>
+                    <a:pt x="7019007" y="2195923"/>
+                  </a:lnTo>
+                  <a:lnTo>
+                    <a:pt x="6947385" y="2190705"/>
+                  </a:lnTo>
+                  <a:lnTo>
+                    <a:pt x="6875762" y="2185355"/>
+                  </a:lnTo>
+                  <a:lnTo>
+                    <a:pt x="6804139" y="2179870"/>
+                  </a:lnTo>
+                  <a:lnTo>
+                    <a:pt x="6732517" y="2174244"/>
+                  </a:lnTo>
+                  <a:lnTo>
+                    <a:pt x="6660894" y="2168476"/>
+                  </a:lnTo>
+                  <a:lnTo>
+                    <a:pt x="6589272" y="2162561"/>
+                  </a:lnTo>
+                  <a:lnTo>
+                    <a:pt x="6517649" y="2156496"/>
+                  </a:lnTo>
+                  <a:lnTo>
+                    <a:pt x="6446027" y="2150277"/>
+                  </a:lnTo>
+                  <a:lnTo>
+                    <a:pt x="6374404" y="2143899"/>
+                  </a:lnTo>
+                  <a:lnTo>
+                    <a:pt x="6302782" y="2137360"/>
+                  </a:lnTo>
+                  <a:lnTo>
+                    <a:pt x="6231159" y="2130654"/>
+                  </a:lnTo>
+                  <a:lnTo>
+                    <a:pt x="6159537" y="2123778"/>
+                  </a:lnTo>
+                  <a:lnTo>
+                    <a:pt x="6087914" y="2116728"/>
+                  </a:lnTo>
+                  <a:lnTo>
+                    <a:pt x="6016292" y="2109498"/>
+                  </a:lnTo>
+                  <a:lnTo>
+                    <a:pt x="5944669" y="2102084"/>
+                  </a:lnTo>
+                  <a:lnTo>
+                    <a:pt x="5873047" y="2094482"/>
+                  </a:lnTo>
+                  <a:lnTo>
+                    <a:pt x="5801424" y="2086687"/>
+                  </a:lnTo>
+                  <a:lnTo>
+                    <a:pt x="5729802" y="2078694"/>
+                  </a:lnTo>
+                  <a:lnTo>
+                    <a:pt x="5658179" y="2070498"/>
+                  </a:lnTo>
+                  <a:lnTo>
+                    <a:pt x="5586557" y="2062093"/>
+                  </a:lnTo>
+                  <a:lnTo>
+                    <a:pt x="5514934" y="2053475"/>
+                  </a:lnTo>
+                  <a:lnTo>
+                    <a:pt x="5443311" y="2044638"/>
+                  </a:lnTo>
+                  <a:lnTo>
+                    <a:pt x="5371689" y="2035576"/>
+                  </a:lnTo>
+                  <a:lnTo>
+                    <a:pt x="5300066" y="2026284"/>
+                  </a:lnTo>
+                  <a:lnTo>
+                    <a:pt x="5228444" y="2016756"/>
+                  </a:lnTo>
+                  <a:lnTo>
+                    <a:pt x="5156821" y="2006986"/>
+                  </a:lnTo>
+                  <a:lnTo>
+                    <a:pt x="5085199" y="1996967"/>
+                  </a:lnTo>
+                  <a:lnTo>
+                    <a:pt x="5013576" y="1986694"/>
+                  </a:lnTo>
+                  <a:lnTo>
+                    <a:pt x="4941954" y="1976160"/>
+                  </a:lnTo>
+                  <a:lnTo>
+                    <a:pt x="4870331" y="1965358"/>
+                  </a:lnTo>
+                  <a:lnTo>
+                    <a:pt x="4798709" y="1954282"/>
+                  </a:lnTo>
+                  <a:lnTo>
+                    <a:pt x="4727086" y="1942924"/>
+                  </a:lnTo>
+                  <a:lnTo>
+                    <a:pt x="4655464" y="1931278"/>
+                  </a:lnTo>
+                  <a:lnTo>
+                    <a:pt x="4583841" y="1919335"/>
+                  </a:lnTo>
+                  <a:lnTo>
+                    <a:pt x="4512219" y="1907090"/>
+                  </a:lnTo>
+                  <a:lnTo>
+                    <a:pt x="4440596" y="1894533"/>
+                  </a:lnTo>
+                  <a:lnTo>
+                    <a:pt x="4368974" y="1881657"/>
+                  </a:lnTo>
+                  <a:lnTo>
+                    <a:pt x="4297351" y="1868453"/>
+                  </a:lnTo>
+                  <a:lnTo>
+                    <a:pt x="4225729" y="1854915"/>
+                  </a:lnTo>
+                  <a:lnTo>
+                    <a:pt x="4154106" y="1841032"/>
+                  </a:lnTo>
+                  <a:lnTo>
+                    <a:pt x="4082483" y="1826796"/>
+                  </a:lnTo>
+                  <a:lnTo>
+                    <a:pt x="4010861" y="1812199"/>
+                  </a:lnTo>
+                  <a:lnTo>
+                    <a:pt x="3939238" y="1797231"/>
+                  </a:lnTo>
+                  <a:lnTo>
+                    <a:pt x="3867616" y="1781882"/>
+                  </a:lnTo>
+                  <a:lnTo>
+                    <a:pt x="3795993" y="1766143"/>
+                  </a:lnTo>
+                  <a:lnTo>
+                    <a:pt x="3724371" y="1750005"/>
+                  </a:lnTo>
+                  <a:lnTo>
+                    <a:pt x="3652748" y="1733456"/>
+                  </a:lnTo>
+                  <a:lnTo>
+                    <a:pt x="3581126" y="1716487"/>
+                  </a:lnTo>
+                  <a:lnTo>
+                    <a:pt x="3509503" y="1699087"/>
+                  </a:lnTo>
+                  <a:lnTo>
+                    <a:pt x="3437881" y="1681244"/>
+                  </a:lnTo>
+                  <a:lnTo>
+                    <a:pt x="3366258" y="1662948"/>
+                  </a:lnTo>
+                  <a:lnTo>
+                    <a:pt x="3294636" y="1644187"/>
+                  </a:lnTo>
+                  <a:lnTo>
+                    <a:pt x="3223013" y="1624950"/>
+                  </a:lnTo>
+                  <a:lnTo>
+                    <a:pt x="3151391" y="1605223"/>
+                  </a:lnTo>
+                  <a:lnTo>
+                    <a:pt x="3079768" y="1584995"/>
+                  </a:lnTo>
+                  <a:lnTo>
+                    <a:pt x="3008146" y="1570058"/>
+                  </a:lnTo>
+                  <a:lnTo>
+                    <a:pt x="2936523" y="1565258"/>
+                  </a:lnTo>
+                  <a:lnTo>
+                    <a:pt x="2864901" y="1560431"/>
+                  </a:lnTo>
+                  <a:lnTo>
+                    <a:pt x="2793278" y="1555575"/>
+                  </a:lnTo>
+                  <a:lnTo>
+                    <a:pt x="2721655" y="1550691"/>
+                  </a:lnTo>
+                  <a:lnTo>
+                    <a:pt x="2650033" y="1545779"/>
+                  </a:lnTo>
+                  <a:lnTo>
+                    <a:pt x="2578410" y="1540839"/>
+                  </a:lnTo>
+                  <a:lnTo>
+                    <a:pt x="2506788" y="1535870"/>
+                  </a:lnTo>
+                  <a:lnTo>
+                    <a:pt x="2435165" y="1530872"/>
+                  </a:lnTo>
+                  <a:lnTo>
+                    <a:pt x="2363543" y="1525846"/>
+                  </a:lnTo>
+                  <a:lnTo>
+                    <a:pt x="2291920" y="1520791"/>
+                  </a:lnTo>
+                  <a:lnTo>
+                    <a:pt x="2220298" y="1515706"/>
+                  </a:lnTo>
+                  <a:lnTo>
+                    <a:pt x="2148675" y="1510592"/>
+                  </a:lnTo>
+                  <a:lnTo>
+                    <a:pt x="2077053" y="1505448"/>
+                  </a:lnTo>
+                  <a:lnTo>
+                    <a:pt x="2005430" y="1500275"/>
+                  </a:lnTo>
+                  <a:lnTo>
+                    <a:pt x="1933808" y="1495072"/>
+                  </a:lnTo>
+                  <a:lnTo>
+                    <a:pt x="1862185" y="1489839"/>
+                  </a:lnTo>
+                  <a:lnTo>
+                    <a:pt x="1790563" y="1484576"/>
+                  </a:lnTo>
+                  <a:lnTo>
+                    <a:pt x="1718940" y="1479282"/>
+                  </a:lnTo>
+                  <a:lnTo>
+                    <a:pt x="1647318" y="1473957"/>
+                  </a:lnTo>
+                  <a:lnTo>
+                    <a:pt x="1575695" y="1468602"/>
+                  </a:lnTo>
+                  <a:lnTo>
+                    <a:pt x="1504073" y="1463216"/>
+                  </a:lnTo>
+                  <a:lnTo>
+                    <a:pt x="1432450" y="1457799"/>
+                  </a:lnTo>
+                  <a:lnTo>
+                    <a:pt x="1360827" y="1452351"/>
+                  </a:lnTo>
+                  <a:lnTo>
+                    <a:pt x="1289205" y="1446871"/>
+                  </a:lnTo>
+                  <a:lnTo>
+                    <a:pt x="1217582" y="1441359"/>
+                  </a:lnTo>
+                  <a:lnTo>
+                    <a:pt x="1145960" y="1435816"/>
+                  </a:lnTo>
+                  <a:lnTo>
+                    <a:pt x="1074337" y="1430241"/>
+                  </a:lnTo>
+                  <a:lnTo>
+                    <a:pt x="1002715" y="1424633"/>
+                  </a:lnTo>
+                  <a:lnTo>
+                    <a:pt x="931092" y="1418993"/>
+                  </a:lnTo>
+                  <a:lnTo>
+                    <a:pt x="859470" y="1413321"/>
+                  </a:lnTo>
+                  <a:lnTo>
+                    <a:pt x="787847" y="1407615"/>
+                  </a:lnTo>
+                  <a:lnTo>
+                    <a:pt x="716225" y="1401877"/>
+                  </a:lnTo>
+                  <a:lnTo>
+                    <a:pt x="644602" y="1396106"/>
+                  </a:lnTo>
+                  <a:lnTo>
+                    <a:pt x="572980" y="1390301"/>
+                  </a:lnTo>
+                  <a:lnTo>
+                    <a:pt x="501357" y="1384463"/>
+                  </a:lnTo>
+                  <a:lnTo>
+                    <a:pt x="429735" y="1378591"/>
+                  </a:lnTo>
+                  <a:lnTo>
+                    <a:pt x="358112" y="1372685"/>
+                  </a:lnTo>
+                  <a:lnTo>
+                    <a:pt x="286490" y="1366745"/>
+                  </a:lnTo>
+                  <a:lnTo>
+                    <a:pt x="214867" y="1360771"/>
+                  </a:lnTo>
+                  <a:lnTo>
+                    <a:pt x="143245" y="1354762"/>
+                  </a:lnTo>
+                  <a:lnTo>
+                    <a:pt x="71622" y="1348719"/>
+                  </a:lnTo>
+                  <a:lnTo>
+                    <a:pt x="0" y="1342640"/>
                   </a:lnTo>
                   <a:close/>
                 </a:path>
@@ -4020,312 +4020,312 @@
           </p:nvSpPr>
           <p:spPr>
             <a:xfrm>
-              <a:off x="1172049" y="3161258"/>
-              <a:ext cx="7090630" cy="1795567"/>
+              <a:off x="1172049" y="3156006"/>
+              <a:ext cx="7090630" cy="1802626"/>
             </a:xfrm>
             <a:custGeom>
               <a:avLst/>
               <a:pathLst>
-                <a:path w="7090630" h="1795567">
+                <a:path w="7090630" h="1802626">
                   <a:moveTo>
                     <a:pt x="0" y="0"/>
                   </a:moveTo>
                   <a:lnTo>
-                    <a:pt x="71622" y="59255"/>
-                  </a:lnTo>
-                  <a:lnTo>
-                    <a:pt x="143245" y="117044"/>
-                  </a:lnTo>
-                  <a:lnTo>
-                    <a:pt x="214867" y="173405"/>
-                  </a:lnTo>
-                  <a:lnTo>
-                    <a:pt x="286490" y="228372"/>
-                  </a:lnTo>
-                  <a:lnTo>
-                    <a:pt x="358112" y="281979"/>
-                  </a:lnTo>
-                  <a:lnTo>
-                    <a:pt x="429735" y="334260"/>
-                  </a:lnTo>
-                  <a:lnTo>
-                    <a:pt x="501357" y="385249"/>
-                  </a:lnTo>
-                  <a:lnTo>
-                    <a:pt x="572980" y="434977"/>
-                  </a:lnTo>
-                  <a:lnTo>
-                    <a:pt x="644602" y="483474"/>
-                  </a:lnTo>
-                  <a:lnTo>
-                    <a:pt x="716225" y="530773"/>
-                  </a:lnTo>
-                  <a:lnTo>
-                    <a:pt x="787847" y="576901"/>
-                  </a:lnTo>
-                  <a:lnTo>
-                    <a:pt x="859470" y="621889"/>
-                  </a:lnTo>
-                  <a:lnTo>
-                    <a:pt x="931092" y="665764"/>
-                  </a:lnTo>
-                  <a:lnTo>
-                    <a:pt x="1002715" y="708555"/>
-                  </a:lnTo>
-                  <a:lnTo>
-                    <a:pt x="1074337" y="750286"/>
-                  </a:lnTo>
-                  <a:lnTo>
-                    <a:pt x="1145960" y="790986"/>
-                  </a:lnTo>
-                  <a:lnTo>
-                    <a:pt x="1217582" y="830680"/>
-                  </a:lnTo>
-                  <a:lnTo>
-                    <a:pt x="1289205" y="869391"/>
-                  </a:lnTo>
-                  <a:lnTo>
-                    <a:pt x="1360827" y="907145"/>
-                  </a:lnTo>
-                  <a:lnTo>
-                    <a:pt x="1432450" y="943966"/>
-                  </a:lnTo>
-                  <a:lnTo>
-                    <a:pt x="1504073" y="979876"/>
-                  </a:lnTo>
-                  <a:lnTo>
-                    <a:pt x="1575695" y="1014898"/>
-                  </a:lnTo>
-                  <a:lnTo>
-                    <a:pt x="1647318" y="1049054"/>
-                  </a:lnTo>
-                  <a:lnTo>
-                    <a:pt x="1718940" y="1082365"/>
-                  </a:lnTo>
-                  <a:lnTo>
-                    <a:pt x="1790563" y="1114852"/>
-                  </a:lnTo>
-                  <a:lnTo>
-                    <a:pt x="1862185" y="1146536"/>
-                  </a:lnTo>
-                  <a:lnTo>
-                    <a:pt x="1933808" y="1177436"/>
-                  </a:lnTo>
-                  <a:lnTo>
-                    <a:pt x="2005430" y="1207572"/>
-                  </a:lnTo>
-                  <a:lnTo>
-                    <a:pt x="2077053" y="1236963"/>
-                  </a:lnTo>
-                  <a:lnTo>
-                    <a:pt x="2148675" y="1265627"/>
-                  </a:lnTo>
-                  <a:lnTo>
-                    <a:pt x="2220298" y="1293582"/>
-                  </a:lnTo>
-                  <a:lnTo>
-                    <a:pt x="2291920" y="1320845"/>
-                  </a:lnTo>
-                  <a:lnTo>
-                    <a:pt x="2363543" y="1347435"/>
-                  </a:lnTo>
-                  <a:lnTo>
-                    <a:pt x="2435165" y="1373366"/>
-                  </a:lnTo>
-                  <a:lnTo>
-                    <a:pt x="2506788" y="1398657"/>
-                  </a:lnTo>
-                  <a:lnTo>
-                    <a:pt x="2578410" y="1423322"/>
-                  </a:lnTo>
-                  <a:lnTo>
-                    <a:pt x="2650033" y="1447377"/>
-                  </a:lnTo>
-                  <a:lnTo>
-                    <a:pt x="2721655" y="1470837"/>
-                  </a:lnTo>
-                  <a:lnTo>
-                    <a:pt x="2793278" y="1493717"/>
-                  </a:lnTo>
-                  <a:lnTo>
-                    <a:pt x="2864901" y="1516031"/>
-                  </a:lnTo>
-                  <a:lnTo>
-                    <a:pt x="2936523" y="1537793"/>
-                  </a:lnTo>
-                  <a:lnTo>
-                    <a:pt x="3008146" y="1559017"/>
-                  </a:lnTo>
-                  <a:lnTo>
-                    <a:pt x="3079768" y="1569551"/>
-                  </a:lnTo>
-                  <a:lnTo>
-                    <a:pt x="3151391" y="1574253"/>
-                  </a:lnTo>
-                  <a:lnTo>
-                    <a:pt x="3223013" y="1578927"/>
-                  </a:lnTo>
-                  <a:lnTo>
-                    <a:pt x="3294636" y="1583576"/>
-                  </a:lnTo>
-                  <a:lnTo>
-                    <a:pt x="3366258" y="1588198"/>
-                  </a:lnTo>
-                  <a:lnTo>
-                    <a:pt x="3437881" y="1592793"/>
-                  </a:lnTo>
-                  <a:lnTo>
-                    <a:pt x="3509503" y="1597362"/>
-                  </a:lnTo>
-                  <a:lnTo>
-                    <a:pt x="3581126" y="1601906"/>
-                  </a:lnTo>
-                  <a:lnTo>
-                    <a:pt x="3652748" y="1606423"/>
-                  </a:lnTo>
-                  <a:lnTo>
-                    <a:pt x="3724371" y="1610915"/>
-                  </a:lnTo>
-                  <a:lnTo>
-                    <a:pt x="3795993" y="1615381"/>
-                  </a:lnTo>
-                  <a:lnTo>
-                    <a:pt x="3867616" y="1619822"/>
-                  </a:lnTo>
-                  <a:lnTo>
-                    <a:pt x="3939238" y="1624238"/>
-                  </a:lnTo>
-                  <a:lnTo>
-                    <a:pt x="4010861" y="1628628"/>
-                  </a:lnTo>
-                  <a:lnTo>
-                    <a:pt x="4082483" y="1632994"/>
-                  </a:lnTo>
-                  <a:lnTo>
-                    <a:pt x="4154106" y="1637334"/>
-                  </a:lnTo>
-                  <a:lnTo>
-                    <a:pt x="4225729" y="1641650"/>
-                  </a:lnTo>
-                  <a:lnTo>
-                    <a:pt x="4297351" y="1645942"/>
-                  </a:lnTo>
-                  <a:lnTo>
-                    <a:pt x="4368974" y="1650209"/>
-                  </a:lnTo>
-                  <a:lnTo>
-                    <a:pt x="4440596" y="1654451"/>
-                  </a:lnTo>
-                  <a:lnTo>
-                    <a:pt x="4512219" y="1658670"/>
-                  </a:lnTo>
-                  <a:lnTo>
-                    <a:pt x="4583841" y="1662865"/>
-                  </a:lnTo>
-                  <a:lnTo>
-                    <a:pt x="4655464" y="1667035"/>
-                  </a:lnTo>
-                  <a:lnTo>
-                    <a:pt x="4727086" y="1671182"/>
-                  </a:lnTo>
-                  <a:lnTo>
-                    <a:pt x="4798709" y="1675306"/>
-                  </a:lnTo>
-                  <a:lnTo>
-                    <a:pt x="4870331" y="1679406"/>
-                  </a:lnTo>
-                  <a:lnTo>
-                    <a:pt x="4941954" y="1683482"/>
-                  </a:lnTo>
-                  <a:lnTo>
-                    <a:pt x="5013576" y="1687536"/>
-                  </a:lnTo>
-                  <a:lnTo>
-                    <a:pt x="5085199" y="1691566"/>
-                  </a:lnTo>
-                  <a:lnTo>
-                    <a:pt x="5156821" y="1695573"/>
-                  </a:lnTo>
-                  <a:lnTo>
-                    <a:pt x="5228444" y="1699558"/>
-                  </a:lnTo>
-                  <a:lnTo>
-                    <a:pt x="5300066" y="1703520"/>
-                  </a:lnTo>
-                  <a:lnTo>
-                    <a:pt x="5371689" y="1707459"/>
-                  </a:lnTo>
-                  <a:lnTo>
-                    <a:pt x="5443311" y="1711377"/>
-                  </a:lnTo>
-                  <a:lnTo>
-                    <a:pt x="5514934" y="1715271"/>
-                  </a:lnTo>
-                  <a:lnTo>
-                    <a:pt x="5586557" y="1719144"/>
-                  </a:lnTo>
-                  <a:lnTo>
-                    <a:pt x="5658179" y="1722994"/>
-                  </a:lnTo>
-                  <a:lnTo>
-                    <a:pt x="5729802" y="1726823"/>
-                  </a:lnTo>
-                  <a:lnTo>
-                    <a:pt x="5801424" y="1730630"/>
-                  </a:lnTo>
-                  <a:lnTo>
-                    <a:pt x="5873047" y="1734415"/>
-                  </a:lnTo>
-                  <a:lnTo>
-                    <a:pt x="5944669" y="1738179"/>
-                  </a:lnTo>
-                  <a:lnTo>
-                    <a:pt x="6016292" y="1741921"/>
-                  </a:lnTo>
-                  <a:lnTo>
-                    <a:pt x="6087914" y="1745642"/>
-                  </a:lnTo>
-                  <a:lnTo>
-                    <a:pt x="6159537" y="1749342"/>
-                  </a:lnTo>
-                  <a:lnTo>
-                    <a:pt x="6231159" y="1753021"/>
-                  </a:lnTo>
-                  <a:lnTo>
-                    <a:pt x="6302782" y="1756678"/>
-                  </a:lnTo>
-                  <a:lnTo>
-                    <a:pt x="6374404" y="1760315"/>
-                  </a:lnTo>
-                  <a:lnTo>
-                    <a:pt x="6446027" y="1763932"/>
-                  </a:lnTo>
-                  <a:lnTo>
-                    <a:pt x="6517649" y="1767527"/>
-                  </a:lnTo>
-                  <a:lnTo>
-                    <a:pt x="6589272" y="1771103"/>
-                  </a:lnTo>
-                  <a:lnTo>
-                    <a:pt x="6660894" y="1774658"/>
-                  </a:lnTo>
-                  <a:lnTo>
-                    <a:pt x="6732517" y="1778192"/>
-                  </a:lnTo>
-                  <a:lnTo>
-                    <a:pt x="6804139" y="1781707"/>
-                  </a:lnTo>
-                  <a:lnTo>
-                    <a:pt x="6875762" y="1785202"/>
-                  </a:lnTo>
-                  <a:lnTo>
-                    <a:pt x="6947385" y="1788676"/>
-                  </a:lnTo>
-                  <a:lnTo>
-                    <a:pt x="7019007" y="1792131"/>
-                  </a:lnTo>
-                  <a:lnTo>
-                    <a:pt x="7090630" y="1795567"/>
+                    <a:pt x="71622" y="59506"/>
+                  </a:lnTo>
+                  <a:lnTo>
+                    <a:pt x="143245" y="117537"/>
+                  </a:lnTo>
+                  <a:lnTo>
+                    <a:pt x="214867" y="174130"/>
+                  </a:lnTo>
+                  <a:lnTo>
+                    <a:pt x="286490" y="229321"/>
+                  </a:lnTo>
+                  <a:lnTo>
+                    <a:pt x="358112" y="283144"/>
+                  </a:lnTo>
+                  <a:lnTo>
+                    <a:pt x="429735" y="335634"/>
+                  </a:lnTo>
+                  <a:lnTo>
+                    <a:pt x="501357" y="386822"/>
+                  </a:lnTo>
+                  <a:lnTo>
+                    <a:pt x="572980" y="436742"/>
+                  </a:lnTo>
+                  <a:lnTo>
+                    <a:pt x="644602" y="485425"/>
+                  </a:lnTo>
+                  <a:lnTo>
+                    <a:pt x="716225" y="532902"/>
+                  </a:lnTo>
+                  <a:lnTo>
+                    <a:pt x="787847" y="579202"/>
+                  </a:lnTo>
+                  <a:lnTo>
+                    <a:pt x="859470" y="624355"/>
+                  </a:lnTo>
+                  <a:lnTo>
+                    <a:pt x="931092" y="668388"/>
+                  </a:lnTo>
+                  <a:lnTo>
+                    <a:pt x="1002715" y="711331"/>
+                  </a:lnTo>
+                  <a:lnTo>
+                    <a:pt x="1074337" y="753209"/>
+                  </a:lnTo>
+                  <a:lnTo>
+                    <a:pt x="1145960" y="794050"/>
+                  </a:lnTo>
+                  <a:lnTo>
+                    <a:pt x="1217582" y="833878"/>
+                  </a:lnTo>
+                  <a:lnTo>
+                    <a:pt x="1289205" y="872720"/>
+                  </a:lnTo>
+                  <a:lnTo>
+                    <a:pt x="1360827" y="910598"/>
+                  </a:lnTo>
+                  <a:lnTo>
+                    <a:pt x="1432450" y="947539"/>
+                  </a:lnTo>
+                  <a:lnTo>
+                    <a:pt x="1504073" y="983563"/>
+                  </a:lnTo>
+                  <a:lnTo>
+                    <a:pt x="1575695" y="1018695"/>
+                  </a:lnTo>
+                  <a:lnTo>
+                    <a:pt x="1647318" y="1052957"/>
+                  </a:lnTo>
+                  <a:lnTo>
+                    <a:pt x="1718940" y="1086369"/>
+                  </a:lnTo>
+                  <a:lnTo>
+                    <a:pt x="1790563" y="1118954"/>
+                  </a:lnTo>
+                  <a:lnTo>
+                    <a:pt x="1862185" y="1150730"/>
+                  </a:lnTo>
+                  <a:lnTo>
+                    <a:pt x="1933808" y="1181720"/>
+                  </a:lnTo>
+                  <a:lnTo>
+                    <a:pt x="2005430" y="1211941"/>
+                  </a:lnTo>
+                  <a:lnTo>
+                    <a:pt x="2077053" y="1241414"/>
+                  </a:lnTo>
+                  <a:lnTo>
+                    <a:pt x="2148675" y="1270156"/>
+                  </a:lnTo>
+                  <a:lnTo>
+                    <a:pt x="2220298" y="1298186"/>
+                  </a:lnTo>
+                  <a:lnTo>
+                    <a:pt x="2291920" y="1325521"/>
+                  </a:lnTo>
+                  <a:lnTo>
+                    <a:pt x="2363543" y="1352179"/>
+                  </a:lnTo>
+                  <a:lnTo>
+                    <a:pt x="2435165" y="1378176"/>
+                  </a:lnTo>
+                  <a:lnTo>
+                    <a:pt x="2506788" y="1403529"/>
+                  </a:lnTo>
+                  <a:lnTo>
+                    <a:pt x="2578410" y="1428254"/>
+                  </a:lnTo>
+                  <a:lnTo>
+                    <a:pt x="2650033" y="1452366"/>
+                  </a:lnTo>
+                  <a:lnTo>
+                    <a:pt x="2721655" y="1475880"/>
+                  </a:lnTo>
+                  <a:lnTo>
+                    <a:pt x="2793278" y="1498812"/>
+                  </a:lnTo>
+                  <a:lnTo>
+                    <a:pt x="2864901" y="1521176"/>
+                  </a:lnTo>
+                  <a:lnTo>
+                    <a:pt x="2936523" y="1542985"/>
+                  </a:lnTo>
+                  <a:lnTo>
+                    <a:pt x="3008146" y="1564254"/>
+                  </a:lnTo>
+                  <a:lnTo>
+                    <a:pt x="3079768" y="1574831"/>
+                  </a:lnTo>
+                  <a:lnTo>
+                    <a:pt x="3151391" y="1579576"/>
+                  </a:lnTo>
+                  <a:lnTo>
+                    <a:pt x="3223013" y="1584294"/>
+                  </a:lnTo>
+                  <a:lnTo>
+                    <a:pt x="3294636" y="1588985"/>
+                  </a:lnTo>
+                  <a:lnTo>
+                    <a:pt x="3366258" y="1593649"/>
+                  </a:lnTo>
+                  <a:lnTo>
+                    <a:pt x="3437881" y="1598286"/>
+                  </a:lnTo>
+                  <a:lnTo>
+                    <a:pt x="3509503" y="1602896"/>
+                  </a:lnTo>
+                  <a:lnTo>
+                    <a:pt x="3581126" y="1607480"/>
+                  </a:lnTo>
+                  <a:lnTo>
+                    <a:pt x="3652748" y="1612038"/>
+                  </a:lnTo>
+                  <a:lnTo>
+                    <a:pt x="3724371" y="1616569"/>
+                  </a:lnTo>
+                  <a:lnTo>
+                    <a:pt x="3795993" y="1621075"/>
+                  </a:lnTo>
+                  <a:lnTo>
+                    <a:pt x="3867616" y="1625555"/>
+                  </a:lnTo>
+                  <a:lnTo>
+                    <a:pt x="3939238" y="1630008"/>
+                  </a:lnTo>
+                  <a:lnTo>
+                    <a:pt x="4010861" y="1634437"/>
+                  </a:lnTo>
+                  <a:lnTo>
+                    <a:pt x="4082483" y="1638840"/>
+                  </a:lnTo>
+                  <a:lnTo>
+                    <a:pt x="4154106" y="1643217"/>
+                  </a:lnTo>
+                  <a:lnTo>
+                    <a:pt x="4225729" y="1647570"/>
+                  </a:lnTo>
+                  <a:lnTo>
+                    <a:pt x="4297351" y="1651897"/>
+                  </a:lnTo>
+                  <a:lnTo>
+                    <a:pt x="4368974" y="1656200"/>
+                  </a:lnTo>
+                  <a:lnTo>
+                    <a:pt x="4440596" y="1660478"/>
+                  </a:lnTo>
+                  <a:lnTo>
+                    <a:pt x="4512219" y="1664731"/>
+                  </a:lnTo>
+                  <a:lnTo>
+                    <a:pt x="4583841" y="1668960"/>
+                  </a:lnTo>
+                  <a:lnTo>
+                    <a:pt x="4655464" y="1673165"/>
+                  </a:lnTo>
+                  <a:lnTo>
+                    <a:pt x="4727086" y="1677345"/>
+                  </a:lnTo>
+                  <a:lnTo>
+                    <a:pt x="4798709" y="1681502"/>
+                  </a:lnTo>
+                  <a:lnTo>
+                    <a:pt x="4870331" y="1685635"/>
+                  </a:lnTo>
+                  <a:lnTo>
+                    <a:pt x="4941954" y="1689743"/>
+                  </a:lnTo>
+                  <a:lnTo>
+                    <a:pt x="5013576" y="1693829"/>
+                  </a:lnTo>
+                  <a:lnTo>
+                    <a:pt x="5085199" y="1697891"/>
+                  </a:lnTo>
+                  <a:lnTo>
+                    <a:pt x="5156821" y="1701929"/>
+                  </a:lnTo>
+                  <a:lnTo>
+                    <a:pt x="5228444" y="1705945"/>
+                  </a:lnTo>
+                  <a:lnTo>
+                    <a:pt x="5300066" y="1709937"/>
+                  </a:lnTo>
+                  <a:lnTo>
+                    <a:pt x="5371689" y="1713906"/>
+                  </a:lnTo>
+                  <a:lnTo>
+                    <a:pt x="5443311" y="1717853"/>
+                  </a:lnTo>
+                  <a:lnTo>
+                    <a:pt x="5514934" y="1721777"/>
+                  </a:lnTo>
+                  <a:lnTo>
+                    <a:pt x="5586557" y="1725678"/>
+                  </a:lnTo>
+                  <a:lnTo>
+                    <a:pt x="5658179" y="1729557"/>
+                  </a:lnTo>
+                  <a:lnTo>
+                    <a:pt x="5729802" y="1733414"/>
+                  </a:lnTo>
+                  <a:lnTo>
+                    <a:pt x="5801424" y="1737248"/>
+                  </a:lnTo>
+                  <a:lnTo>
+                    <a:pt x="5873047" y="1741061"/>
+                  </a:lnTo>
+                  <a:lnTo>
+                    <a:pt x="5944669" y="1744852"/>
+                  </a:lnTo>
+                  <a:lnTo>
+                    <a:pt x="6016292" y="1748621"/>
+                  </a:lnTo>
+                  <a:lnTo>
+                    <a:pt x="6087914" y="1752368"/>
+                  </a:lnTo>
+                  <a:lnTo>
+                    <a:pt x="6159537" y="1756094"/>
+                  </a:lnTo>
+                  <a:lnTo>
+                    <a:pt x="6231159" y="1759798"/>
+                  </a:lnTo>
+                  <a:lnTo>
+                    <a:pt x="6302782" y="1763481"/>
+                  </a:lnTo>
+                  <a:lnTo>
+                    <a:pt x="6374404" y="1767143"/>
+                  </a:lnTo>
+                  <a:lnTo>
+                    <a:pt x="6446027" y="1770784"/>
+                  </a:lnTo>
+                  <a:lnTo>
+                    <a:pt x="6517649" y="1774404"/>
+                  </a:lnTo>
+                  <a:lnTo>
+                    <a:pt x="6589272" y="1778003"/>
+                  </a:lnTo>
+                  <a:lnTo>
+                    <a:pt x="6660894" y="1781582"/>
+                  </a:lnTo>
+                  <a:lnTo>
+                    <a:pt x="6732517" y="1785140"/>
+                  </a:lnTo>
+                  <a:lnTo>
+                    <a:pt x="6804139" y="1788677"/>
+                  </a:lnTo>
+                  <a:lnTo>
+                    <a:pt x="6875762" y="1792195"/>
+                  </a:lnTo>
+                  <a:lnTo>
+                    <a:pt x="6947385" y="1795692"/>
+                  </a:lnTo>
+                  <a:lnTo>
+                    <a:pt x="7019007" y="1799169"/>
+                  </a:lnTo>
+                  <a:lnTo>
+                    <a:pt x="7090630" y="1802626"/>
                   </a:lnTo>
                 </a:path>
               </a:pathLst>
@@ -4345,309 +4345,309 @@
           </p:nvSpPr>
           <p:spPr>
             <a:xfrm>
-              <a:off x="1172049" y="4501031"/>
-              <a:ext cx="7090630" cy="855399"/>
+              <a:off x="1172049" y="4498647"/>
+              <a:ext cx="7090630" cy="858370"/>
             </a:xfrm>
             <a:custGeom>
               <a:avLst/>
               <a:pathLst>
-                <a:path w="7090630" h="855399">
+                <a:path w="7090630" h="858370">
                   <a:moveTo>
-                    <a:pt x="7090630" y="855399"/>
+                    <a:pt x="7090630" y="858370"/>
                   </a:moveTo>
                   <a:lnTo>
-                    <a:pt x="7019007" y="850307"/>
-                  </a:lnTo>
-                  <a:lnTo>
-                    <a:pt x="6947385" y="845085"/>
-                  </a:lnTo>
-                  <a:lnTo>
-                    <a:pt x="6875762" y="839731"/>
-                  </a:lnTo>
-                  <a:lnTo>
-                    <a:pt x="6804139" y="834242"/>
-                  </a:lnTo>
-                  <a:lnTo>
-                    <a:pt x="6732517" y="828613"/>
-                  </a:lnTo>
-                  <a:lnTo>
-                    <a:pt x="6660894" y="822841"/>
-                  </a:lnTo>
-                  <a:lnTo>
-                    <a:pt x="6589272" y="816923"/>
-                  </a:lnTo>
-                  <a:lnTo>
-                    <a:pt x="6517649" y="810855"/>
-                  </a:lnTo>
-                  <a:lnTo>
-                    <a:pt x="6446027" y="804633"/>
-                  </a:lnTo>
-                  <a:lnTo>
-                    <a:pt x="6374404" y="798253"/>
-                  </a:lnTo>
-                  <a:lnTo>
-                    <a:pt x="6302782" y="791712"/>
-                  </a:lnTo>
-                  <a:lnTo>
-                    <a:pt x="6231159" y="785005"/>
-                  </a:lnTo>
-                  <a:lnTo>
-                    <a:pt x="6159537" y="778127"/>
-                  </a:lnTo>
-                  <a:lnTo>
-                    <a:pt x="6087914" y="771075"/>
-                  </a:lnTo>
-                  <a:lnTo>
-                    <a:pt x="6016292" y="763845"/>
-                  </a:lnTo>
-                  <a:lnTo>
-                    <a:pt x="5944669" y="756430"/>
-                  </a:lnTo>
-                  <a:lnTo>
-                    <a:pt x="5873047" y="748828"/>
-                  </a:lnTo>
-                  <a:lnTo>
-                    <a:pt x="5801424" y="741034"/>
-                  </a:lnTo>
-                  <a:lnTo>
-                    <a:pt x="5729802" y="733041"/>
-                  </a:lnTo>
-                  <a:lnTo>
-                    <a:pt x="5658179" y="724846"/>
-                  </a:lnTo>
-                  <a:lnTo>
-                    <a:pt x="5586557" y="716443"/>
-                  </a:lnTo>
-                  <a:lnTo>
-                    <a:pt x="5514934" y="707827"/>
-                  </a:lnTo>
-                  <a:lnTo>
-                    <a:pt x="5443311" y="698992"/>
-                  </a:lnTo>
-                  <a:lnTo>
-                    <a:pt x="5371689" y="689934"/>
-                  </a:lnTo>
-                  <a:lnTo>
-                    <a:pt x="5300066" y="680646"/>
-                  </a:lnTo>
-                  <a:lnTo>
-                    <a:pt x="5228444" y="671122"/>
-                  </a:lnTo>
-                  <a:lnTo>
-                    <a:pt x="5156821" y="661357"/>
-                  </a:lnTo>
-                  <a:lnTo>
-                    <a:pt x="5085199" y="651344"/>
-                  </a:lnTo>
-                  <a:lnTo>
-                    <a:pt x="5013576" y="641077"/>
-                  </a:lnTo>
-                  <a:lnTo>
-                    <a:pt x="4941954" y="630550"/>
-                  </a:lnTo>
-                  <a:lnTo>
-                    <a:pt x="4870331" y="619755"/>
-                  </a:lnTo>
-                  <a:lnTo>
-                    <a:pt x="4798709" y="608688"/>
-                  </a:lnTo>
-                  <a:lnTo>
-                    <a:pt x="4727086" y="597339"/>
-                  </a:lnTo>
-                  <a:lnTo>
-                    <a:pt x="4655464" y="585703"/>
-                  </a:lnTo>
-                  <a:lnTo>
-                    <a:pt x="4583841" y="573771"/>
-                  </a:lnTo>
-                  <a:lnTo>
-                    <a:pt x="4512219" y="561537"/>
-                  </a:lnTo>
-                  <a:lnTo>
-                    <a:pt x="4440596" y="548993"/>
-                  </a:lnTo>
-                  <a:lnTo>
-                    <a:pt x="4368974" y="536131"/>
-                  </a:lnTo>
-                  <a:lnTo>
-                    <a:pt x="4297351" y="522943"/>
-                  </a:lnTo>
-                  <a:lnTo>
-                    <a:pt x="4225729" y="509420"/>
-                  </a:lnTo>
-                  <a:lnTo>
-                    <a:pt x="4154106" y="495554"/>
-                  </a:lnTo>
-                  <a:lnTo>
-                    <a:pt x="4082483" y="481337"/>
-                  </a:lnTo>
-                  <a:lnTo>
-                    <a:pt x="4010861" y="466759"/>
-                  </a:lnTo>
-                  <a:lnTo>
-                    <a:pt x="3939238" y="451811"/>
-                  </a:lnTo>
-                  <a:lnTo>
-                    <a:pt x="3867616" y="436485"/>
-                  </a:lnTo>
-                  <a:lnTo>
-                    <a:pt x="3795993" y="420769"/>
-                  </a:lnTo>
-                  <a:lnTo>
-                    <a:pt x="3724371" y="404655"/>
-                  </a:lnTo>
-                  <a:lnTo>
-                    <a:pt x="3652748" y="388133"/>
-                  </a:lnTo>
-                  <a:lnTo>
-                    <a:pt x="3581126" y="371192"/>
-                  </a:lnTo>
-                  <a:lnTo>
-                    <a:pt x="3509503" y="353821"/>
-                  </a:lnTo>
-                  <a:lnTo>
-                    <a:pt x="3437881" y="336009"/>
-                  </a:lnTo>
-                  <a:lnTo>
-                    <a:pt x="3366258" y="317746"/>
-                  </a:lnTo>
-                  <a:lnTo>
-                    <a:pt x="3294636" y="299020"/>
-                  </a:lnTo>
-                  <a:lnTo>
-                    <a:pt x="3223013" y="279819"/>
-                  </a:lnTo>
-                  <a:lnTo>
-                    <a:pt x="3151391" y="260131"/>
-                  </a:lnTo>
-                  <a:lnTo>
-                    <a:pt x="3079768" y="239944"/>
-                  </a:lnTo>
-                  <a:lnTo>
-                    <a:pt x="3008146" y="225050"/>
-                  </a:lnTo>
-                  <a:lnTo>
-                    <a:pt x="2936523" y="220294"/>
-                  </a:lnTo>
-                  <a:lnTo>
-                    <a:pt x="2864901" y="215511"/>
-                  </a:lnTo>
-                  <a:lnTo>
-                    <a:pt x="2793278" y="210701"/>
-                  </a:lnTo>
-                  <a:lnTo>
-                    <a:pt x="2721655" y="205864"/>
-                  </a:lnTo>
-                  <a:lnTo>
-                    <a:pt x="2650033" y="200998"/>
-                  </a:lnTo>
-                  <a:lnTo>
-                    <a:pt x="2578410" y="196105"/>
-                  </a:lnTo>
-                  <a:lnTo>
-                    <a:pt x="2506788" y="191184"/>
-                  </a:lnTo>
-                  <a:lnTo>
-                    <a:pt x="2435165" y="186235"/>
-                  </a:lnTo>
-                  <a:lnTo>
-                    <a:pt x="2363543" y="181257"/>
-                  </a:lnTo>
-                  <a:lnTo>
-                    <a:pt x="2291920" y="176251"/>
-                  </a:lnTo>
-                  <a:lnTo>
-                    <a:pt x="2220298" y="171216"/>
-                  </a:lnTo>
-                  <a:lnTo>
-                    <a:pt x="2148675" y="166153"/>
-                  </a:lnTo>
-                  <a:lnTo>
-                    <a:pt x="2077053" y="161060"/>
-                  </a:lnTo>
-                  <a:lnTo>
-                    <a:pt x="2005430" y="155939"/>
-                  </a:lnTo>
-                  <a:lnTo>
-                    <a:pt x="1933808" y="150788"/>
-                  </a:lnTo>
-                  <a:lnTo>
-                    <a:pt x="1862185" y="145607"/>
-                  </a:lnTo>
-                  <a:lnTo>
-                    <a:pt x="1790563" y="140397"/>
-                  </a:lnTo>
-                  <a:lnTo>
-                    <a:pt x="1718940" y="135157"/>
-                  </a:lnTo>
-                  <a:lnTo>
-                    <a:pt x="1647318" y="129888"/>
-                  </a:lnTo>
-                  <a:lnTo>
-                    <a:pt x="1575695" y="124588"/>
-                  </a:lnTo>
-                  <a:lnTo>
-                    <a:pt x="1504073" y="119257"/>
-                  </a:lnTo>
-                  <a:lnTo>
-                    <a:pt x="1432450" y="113896"/>
-                  </a:lnTo>
-                  <a:lnTo>
-                    <a:pt x="1360827" y="108505"/>
-                  </a:lnTo>
-                  <a:lnTo>
-                    <a:pt x="1289205" y="103083"/>
-                  </a:lnTo>
-                  <a:lnTo>
-                    <a:pt x="1217582" y="97629"/>
-                  </a:lnTo>
-                  <a:lnTo>
-                    <a:pt x="1145960" y="92145"/>
-                  </a:lnTo>
-                  <a:lnTo>
-                    <a:pt x="1074337" y="86629"/>
-                  </a:lnTo>
-                  <a:lnTo>
-                    <a:pt x="1002715" y="81081"/>
-                  </a:lnTo>
-                  <a:lnTo>
-                    <a:pt x="931092" y="75502"/>
-                  </a:lnTo>
-                  <a:lnTo>
-                    <a:pt x="859470" y="69891"/>
-                  </a:lnTo>
-                  <a:lnTo>
-                    <a:pt x="787847" y="64248"/>
-                  </a:lnTo>
-                  <a:lnTo>
-                    <a:pt x="716225" y="58572"/>
-                  </a:lnTo>
-                  <a:lnTo>
-                    <a:pt x="644602" y="52864"/>
-                  </a:lnTo>
-                  <a:lnTo>
-                    <a:pt x="572980" y="47123"/>
-                  </a:lnTo>
-                  <a:lnTo>
-                    <a:pt x="501357" y="41350"/>
-                  </a:lnTo>
-                  <a:lnTo>
-                    <a:pt x="429735" y="35543"/>
-                  </a:lnTo>
-                  <a:lnTo>
-                    <a:pt x="358112" y="29703"/>
-                  </a:lnTo>
-                  <a:lnTo>
-                    <a:pt x="286490" y="23830"/>
-                  </a:lnTo>
-                  <a:lnTo>
-                    <a:pt x="214867" y="17923"/>
-                  </a:lnTo>
-                  <a:lnTo>
-                    <a:pt x="143245" y="11983"/>
-                  </a:lnTo>
-                  <a:lnTo>
-                    <a:pt x="71622" y="6008"/>
+                    <a:pt x="7019007" y="853282"/>
+                  </a:lnTo>
+                  <a:lnTo>
+                    <a:pt x="6947385" y="848065"/>
+                  </a:lnTo>
+                  <a:lnTo>
+                    <a:pt x="6875762" y="842715"/>
+                  </a:lnTo>
+                  <a:lnTo>
+                    <a:pt x="6804139" y="837229"/>
+                  </a:lnTo>
+                  <a:lnTo>
+                    <a:pt x="6732517" y="831603"/>
+                  </a:lnTo>
+                  <a:lnTo>
+                    <a:pt x="6660894" y="825835"/>
+                  </a:lnTo>
+                  <a:lnTo>
+                    <a:pt x="6589272" y="819920"/>
+                  </a:lnTo>
+                  <a:lnTo>
+                    <a:pt x="6517649" y="813855"/>
+                  </a:lnTo>
+                  <a:lnTo>
+                    <a:pt x="6446027" y="807636"/>
+                  </a:lnTo>
+                  <a:lnTo>
+                    <a:pt x="6374404" y="801258"/>
+                  </a:lnTo>
+                  <a:lnTo>
+                    <a:pt x="6302782" y="794719"/>
+                  </a:lnTo>
+                  <a:lnTo>
+                    <a:pt x="6231159" y="788013"/>
+                  </a:lnTo>
+                  <a:lnTo>
+                    <a:pt x="6159537" y="781137"/>
+                  </a:lnTo>
+                  <a:lnTo>
+                    <a:pt x="6087914" y="774087"/>
+                  </a:lnTo>
+                  <a:lnTo>
+                    <a:pt x="6016292" y="766857"/>
+                  </a:lnTo>
+                  <a:lnTo>
+                    <a:pt x="5944669" y="759443"/>
+                  </a:lnTo>
+                  <a:lnTo>
+                    <a:pt x="5873047" y="751841"/>
+                  </a:lnTo>
+                  <a:lnTo>
+                    <a:pt x="5801424" y="744046"/>
+                  </a:lnTo>
+                  <a:lnTo>
+                    <a:pt x="5729802" y="736053"/>
+                  </a:lnTo>
+                  <a:lnTo>
+                    <a:pt x="5658179" y="727857"/>
+                  </a:lnTo>
+                  <a:lnTo>
+                    <a:pt x="5586557" y="719452"/>
+                  </a:lnTo>
+                  <a:lnTo>
+                    <a:pt x="5514934" y="710834"/>
+                  </a:lnTo>
+                  <a:lnTo>
+                    <a:pt x="5443311" y="701997"/>
+                  </a:lnTo>
+                  <a:lnTo>
+                    <a:pt x="5371689" y="692935"/>
+                  </a:lnTo>
+                  <a:lnTo>
+                    <a:pt x="5300066" y="683643"/>
+                  </a:lnTo>
+                  <a:lnTo>
+                    <a:pt x="5228444" y="674115"/>
+                  </a:lnTo>
+                  <a:lnTo>
+                    <a:pt x="5156821" y="664345"/>
+                  </a:lnTo>
+                  <a:lnTo>
+                    <a:pt x="5085199" y="654326"/>
+                  </a:lnTo>
+                  <a:lnTo>
+                    <a:pt x="5013576" y="644053"/>
+                  </a:lnTo>
+                  <a:lnTo>
+                    <a:pt x="4941954" y="633519"/>
+                  </a:lnTo>
+                  <a:lnTo>
+                    <a:pt x="4870331" y="622717"/>
+                  </a:lnTo>
+                  <a:lnTo>
+                    <a:pt x="4798709" y="611641"/>
+                  </a:lnTo>
+                  <a:lnTo>
+                    <a:pt x="4727086" y="600283"/>
+                  </a:lnTo>
+                  <a:lnTo>
+                    <a:pt x="4655464" y="588637"/>
+                  </a:lnTo>
+                  <a:lnTo>
+                    <a:pt x="4583841" y="576694"/>
+                  </a:lnTo>
+                  <a:lnTo>
+                    <a:pt x="4512219" y="564449"/>
+                  </a:lnTo>
+                  <a:lnTo>
+                    <a:pt x="4440596" y="551892"/>
+                  </a:lnTo>
+                  <a:lnTo>
+                    <a:pt x="4368974" y="539016"/>
+                  </a:lnTo>
+                  <a:lnTo>
+                    <a:pt x="4297351" y="525812"/>
+                  </a:lnTo>
+                  <a:lnTo>
+                    <a:pt x="4225729" y="512274"/>
+                  </a:lnTo>
+                  <a:lnTo>
+                    <a:pt x="4154106" y="498391"/>
+                  </a:lnTo>
+                  <a:lnTo>
+                    <a:pt x="4082483" y="484155"/>
+                  </a:lnTo>
+                  <a:lnTo>
+                    <a:pt x="4010861" y="469558"/>
+                  </a:lnTo>
+                  <a:lnTo>
+                    <a:pt x="3939238" y="454590"/>
+                  </a:lnTo>
+                  <a:lnTo>
+                    <a:pt x="3867616" y="439241"/>
+                  </a:lnTo>
+                  <a:lnTo>
+                    <a:pt x="3795993" y="423502"/>
+                  </a:lnTo>
+                  <a:lnTo>
+                    <a:pt x="3724371" y="407364"/>
+                  </a:lnTo>
+                  <a:lnTo>
+                    <a:pt x="3652748" y="390815"/>
+                  </a:lnTo>
+                  <a:lnTo>
+                    <a:pt x="3581126" y="373846"/>
+                  </a:lnTo>
+                  <a:lnTo>
+                    <a:pt x="3509503" y="356446"/>
+                  </a:lnTo>
+                  <a:lnTo>
+                    <a:pt x="3437881" y="338603"/>
+                  </a:lnTo>
+                  <a:lnTo>
+                    <a:pt x="3366258" y="320307"/>
+                  </a:lnTo>
+                  <a:lnTo>
+                    <a:pt x="3294636" y="301546"/>
+                  </a:lnTo>
+                  <a:lnTo>
+                    <a:pt x="3223013" y="282309"/>
+                  </a:lnTo>
+                  <a:lnTo>
+                    <a:pt x="3151391" y="262582"/>
+                  </a:lnTo>
+                  <a:lnTo>
+                    <a:pt x="3079768" y="242354"/>
+                  </a:lnTo>
+                  <a:lnTo>
+                    <a:pt x="3008146" y="227418"/>
+                  </a:lnTo>
+                  <a:lnTo>
+                    <a:pt x="2936523" y="222617"/>
+                  </a:lnTo>
+                  <a:lnTo>
+                    <a:pt x="2864901" y="217790"/>
+                  </a:lnTo>
+                  <a:lnTo>
+                    <a:pt x="2793278" y="212934"/>
+                  </a:lnTo>
+                  <a:lnTo>
+                    <a:pt x="2721655" y="208050"/>
+                  </a:lnTo>
+                  <a:lnTo>
+                    <a:pt x="2650033" y="203138"/>
+                  </a:lnTo>
+                  <a:lnTo>
+                    <a:pt x="2578410" y="198198"/>
+                  </a:lnTo>
+                  <a:lnTo>
+                    <a:pt x="2506788" y="193229"/>
+                  </a:lnTo>
+                  <a:lnTo>
+                    <a:pt x="2435165" y="188231"/>
+                  </a:lnTo>
+                  <a:lnTo>
+                    <a:pt x="2363543" y="183205"/>
+                  </a:lnTo>
+                  <a:lnTo>
+                    <a:pt x="2291920" y="178150"/>
+                  </a:lnTo>
+                  <a:lnTo>
+                    <a:pt x="2220298" y="173065"/>
+                  </a:lnTo>
+                  <a:lnTo>
+                    <a:pt x="2148675" y="167951"/>
+                  </a:lnTo>
+                  <a:lnTo>
+                    <a:pt x="2077053" y="162807"/>
+                  </a:lnTo>
+                  <a:lnTo>
+                    <a:pt x="2005430" y="157634"/>
+                  </a:lnTo>
+                  <a:lnTo>
+                    <a:pt x="1933808" y="152431"/>
+                  </a:lnTo>
+                  <a:lnTo>
+                    <a:pt x="1862185" y="147198"/>
+                  </a:lnTo>
+                  <a:lnTo>
+                    <a:pt x="1790563" y="141935"/>
+                  </a:lnTo>
+                  <a:lnTo>
+                    <a:pt x="1718940" y="136641"/>
+                  </a:lnTo>
+                  <a:lnTo>
+                    <a:pt x="1647318" y="131316"/>
+                  </a:lnTo>
+                  <a:lnTo>
+                    <a:pt x="1575695" y="125961"/>
+                  </a:lnTo>
+                  <a:lnTo>
+                    <a:pt x="1504073" y="120575"/>
+                  </a:lnTo>
+                  <a:lnTo>
+                    <a:pt x="1432450" y="115158"/>
+                  </a:lnTo>
+                  <a:lnTo>
+                    <a:pt x="1360827" y="109710"/>
+                  </a:lnTo>
+                  <a:lnTo>
+                    <a:pt x="1289205" y="104230"/>
+                  </a:lnTo>
+                  <a:lnTo>
+                    <a:pt x="1217582" y="98718"/>
+                  </a:lnTo>
+                  <a:lnTo>
+                    <a:pt x="1145960" y="93175"/>
+                  </a:lnTo>
+                  <a:lnTo>
+                    <a:pt x="1074337" y="87600"/>
+                  </a:lnTo>
+                  <a:lnTo>
+                    <a:pt x="1002715" y="81992"/>
+                  </a:lnTo>
+                  <a:lnTo>
+                    <a:pt x="931092" y="76352"/>
+                  </a:lnTo>
+                  <a:lnTo>
+                    <a:pt x="859470" y="70680"/>
+                  </a:lnTo>
+                  <a:lnTo>
+                    <a:pt x="787847" y="64974"/>
+                  </a:lnTo>
+                  <a:lnTo>
+                    <a:pt x="716225" y="59236"/>
+                  </a:lnTo>
+                  <a:lnTo>
+                    <a:pt x="644602" y="53465"/>
+                  </a:lnTo>
+                  <a:lnTo>
+                    <a:pt x="572980" y="47660"/>
+                  </a:lnTo>
+                  <a:lnTo>
+                    <a:pt x="501357" y="41822"/>
+                  </a:lnTo>
+                  <a:lnTo>
+                    <a:pt x="429735" y="35950"/>
+                  </a:lnTo>
+                  <a:lnTo>
+                    <a:pt x="358112" y="30044"/>
+                  </a:lnTo>
+                  <a:lnTo>
+                    <a:pt x="286490" y="24104"/>
+                  </a:lnTo>
+                  <a:lnTo>
+                    <a:pt x="214867" y="18130"/>
+                  </a:lnTo>
+                  <a:lnTo>
+                    <a:pt x="143245" y="12121"/>
+                  </a:lnTo>
+                  <a:lnTo>
+                    <a:pt x="71622" y="6078"/>
                   </a:lnTo>
                   <a:lnTo>
                     <a:pt x="0" y="0"/>
@@ -4670,312 +4670,312 @@
           </p:nvSpPr>
           <p:spPr>
             <a:xfrm>
-              <a:off x="1172049" y="3966435"/>
-              <a:ext cx="7090630" cy="1243573"/>
+              <a:off x="1172049" y="3962896"/>
+              <a:ext cx="7090630" cy="1248141"/>
             </a:xfrm>
             <a:custGeom>
               <a:avLst/>
               <a:pathLst>
-                <a:path w="7090630" h="1243573">
+                <a:path w="7090630" h="1248141">
                   <a:moveTo>
                     <a:pt x="0" y="0"/>
                   </a:moveTo>
                   <a:lnTo>
-                    <a:pt x="71622" y="24269"/>
-                  </a:lnTo>
-                  <a:lnTo>
-                    <a:pt x="143245" y="48168"/>
-                  </a:lnTo>
-                  <a:lnTo>
-                    <a:pt x="214867" y="71703"/>
-                  </a:lnTo>
-                  <a:lnTo>
-                    <a:pt x="286490" y="94878"/>
-                  </a:lnTo>
-                  <a:lnTo>
-                    <a:pt x="358112" y="117700"/>
-                  </a:lnTo>
-                  <a:lnTo>
-                    <a:pt x="429735" y="140174"/>
-                  </a:lnTo>
-                  <a:lnTo>
-                    <a:pt x="501357" y="162305"/>
-                  </a:lnTo>
-                  <a:lnTo>
-                    <a:pt x="572980" y="184098"/>
-                  </a:lnTo>
-                  <a:lnTo>
-                    <a:pt x="644602" y="205559"/>
-                  </a:lnTo>
-                  <a:lnTo>
-                    <a:pt x="716225" y="226692"/>
-                  </a:lnTo>
-                  <a:lnTo>
-                    <a:pt x="787847" y="247503"/>
-                  </a:lnTo>
-                  <a:lnTo>
-                    <a:pt x="859470" y="267997"/>
-                  </a:lnTo>
-                  <a:lnTo>
-                    <a:pt x="931092" y="288178"/>
-                  </a:lnTo>
-                  <a:lnTo>
-                    <a:pt x="1002715" y="308051"/>
-                  </a:lnTo>
-                  <a:lnTo>
-                    <a:pt x="1074337" y="327621"/>
-                  </a:lnTo>
-                  <a:lnTo>
-                    <a:pt x="1145960" y="346892"/>
-                  </a:lnTo>
-                  <a:lnTo>
-                    <a:pt x="1217582" y="365869"/>
-                  </a:lnTo>
-                  <a:lnTo>
-                    <a:pt x="1289205" y="384557"/>
-                  </a:lnTo>
-                  <a:lnTo>
-                    <a:pt x="1360827" y="402959"/>
-                  </a:lnTo>
-                  <a:lnTo>
-                    <a:pt x="1432450" y="421081"/>
-                  </a:lnTo>
-                  <a:lnTo>
-                    <a:pt x="1504073" y="438927"/>
-                  </a:lnTo>
-                  <a:lnTo>
-                    <a:pt x="1575695" y="456500"/>
-                  </a:lnTo>
-                  <a:lnTo>
-                    <a:pt x="1647318" y="473805"/>
-                  </a:lnTo>
-                  <a:lnTo>
-                    <a:pt x="1718940" y="490846"/>
-                  </a:lnTo>
-                  <a:lnTo>
-                    <a:pt x="1790563" y="507627"/>
-                  </a:lnTo>
-                  <a:lnTo>
-                    <a:pt x="1862185" y="524152"/>
-                  </a:lnTo>
-                  <a:lnTo>
-                    <a:pt x="1933808" y="540425"/>
-                  </a:lnTo>
-                  <a:lnTo>
-                    <a:pt x="2005430" y="556450"/>
-                  </a:lnTo>
-                  <a:lnTo>
-                    <a:pt x="2077053" y="572230"/>
-                  </a:lnTo>
-                  <a:lnTo>
-                    <a:pt x="2148675" y="587770"/>
-                  </a:lnTo>
-                  <a:lnTo>
-                    <a:pt x="2220298" y="603072"/>
-                  </a:lnTo>
-                  <a:lnTo>
-                    <a:pt x="2291920" y="618141"/>
-                  </a:lnTo>
-                  <a:lnTo>
-                    <a:pt x="2363543" y="632980"/>
-                  </a:lnTo>
-                  <a:lnTo>
-                    <a:pt x="2435165" y="647593"/>
-                  </a:lnTo>
-                  <a:lnTo>
-                    <a:pt x="2506788" y="661983"/>
-                  </a:lnTo>
-                  <a:lnTo>
-                    <a:pt x="2578410" y="676153"/>
-                  </a:lnTo>
-                  <a:lnTo>
-                    <a:pt x="2650033" y="690107"/>
-                  </a:lnTo>
-                  <a:lnTo>
-                    <a:pt x="2721655" y="703848"/>
-                  </a:lnTo>
-                  <a:lnTo>
-                    <a:pt x="2793278" y="717380"/>
-                  </a:lnTo>
-                  <a:lnTo>
-                    <a:pt x="2864901" y="730705"/>
-                  </a:lnTo>
-                  <a:lnTo>
-                    <a:pt x="2936523" y="743826"/>
-                  </a:lnTo>
-                  <a:lnTo>
-                    <a:pt x="3008146" y="756748"/>
-                  </a:lnTo>
-                  <a:lnTo>
-                    <a:pt x="3079768" y="769473"/>
-                  </a:lnTo>
-                  <a:lnTo>
-                    <a:pt x="3151391" y="782003"/>
-                  </a:lnTo>
-                  <a:lnTo>
-                    <a:pt x="3223013" y="794342"/>
-                  </a:lnTo>
-                  <a:lnTo>
-                    <a:pt x="3294636" y="806493"/>
-                  </a:lnTo>
-                  <a:lnTo>
-                    <a:pt x="3366258" y="818459"/>
-                  </a:lnTo>
-                  <a:lnTo>
-                    <a:pt x="3437881" y="830242"/>
-                  </a:lnTo>
-                  <a:lnTo>
-                    <a:pt x="3509503" y="841845"/>
-                  </a:lnTo>
-                  <a:lnTo>
-                    <a:pt x="3581126" y="853271"/>
-                  </a:lnTo>
-                  <a:lnTo>
-                    <a:pt x="3652748" y="864523"/>
-                  </a:lnTo>
-                  <a:lnTo>
-                    <a:pt x="3724371" y="875603"/>
-                  </a:lnTo>
-                  <a:lnTo>
-                    <a:pt x="3795993" y="886515"/>
-                  </a:lnTo>
-                  <a:lnTo>
-                    <a:pt x="3867616" y="897259"/>
-                  </a:lnTo>
-                  <a:lnTo>
-                    <a:pt x="3939238" y="907840"/>
-                  </a:lnTo>
-                  <a:lnTo>
-                    <a:pt x="4010861" y="918260"/>
-                  </a:lnTo>
-                  <a:lnTo>
-                    <a:pt x="4082483" y="928520"/>
-                  </a:lnTo>
-                  <a:lnTo>
-                    <a:pt x="4154106" y="938624"/>
-                  </a:lnTo>
-                  <a:lnTo>
-                    <a:pt x="4225729" y="948574"/>
-                  </a:lnTo>
-                  <a:lnTo>
-                    <a:pt x="4297351" y="958372"/>
-                  </a:lnTo>
-                  <a:lnTo>
-                    <a:pt x="4368974" y="968020"/>
-                  </a:lnTo>
-                  <a:lnTo>
-                    <a:pt x="4440596" y="977522"/>
-                  </a:lnTo>
-                  <a:lnTo>
-                    <a:pt x="4512219" y="986878"/>
-                  </a:lnTo>
-                  <a:lnTo>
-                    <a:pt x="4583841" y="996092"/>
-                  </a:lnTo>
-                  <a:lnTo>
-                    <a:pt x="4655464" y="1005165"/>
-                  </a:lnTo>
-                  <a:lnTo>
-                    <a:pt x="4727086" y="1014100"/>
-                  </a:lnTo>
-                  <a:lnTo>
-                    <a:pt x="4798709" y="1022898"/>
-                  </a:lnTo>
-                  <a:lnTo>
-                    <a:pt x="4870331" y="1031562"/>
-                  </a:lnTo>
-                  <a:lnTo>
-                    <a:pt x="4941954" y="1040094"/>
-                  </a:lnTo>
-                  <a:lnTo>
-                    <a:pt x="5013576" y="1048496"/>
-                  </a:lnTo>
-                  <a:lnTo>
-                    <a:pt x="5085199" y="1056769"/>
-                  </a:lnTo>
-                  <a:lnTo>
-                    <a:pt x="5156821" y="1064917"/>
-                  </a:lnTo>
-                  <a:lnTo>
-                    <a:pt x="5228444" y="1072940"/>
-                  </a:lnTo>
-                  <a:lnTo>
-                    <a:pt x="5300066" y="1080840"/>
-                  </a:lnTo>
-                  <a:lnTo>
-                    <a:pt x="5371689" y="1088621"/>
-                  </a:lnTo>
-                  <a:lnTo>
-                    <a:pt x="5443311" y="1096282"/>
-                  </a:lnTo>
-                  <a:lnTo>
-                    <a:pt x="5514934" y="1103827"/>
-                  </a:lnTo>
-                  <a:lnTo>
-                    <a:pt x="5586557" y="1111256"/>
-                  </a:lnTo>
-                  <a:lnTo>
-                    <a:pt x="5658179" y="1118572"/>
-                  </a:lnTo>
-                  <a:lnTo>
-                    <a:pt x="5729802" y="1125777"/>
-                  </a:lnTo>
-                  <a:lnTo>
-                    <a:pt x="5801424" y="1132871"/>
-                  </a:lnTo>
-                  <a:lnTo>
-                    <a:pt x="5873047" y="1139858"/>
-                  </a:lnTo>
-                  <a:lnTo>
-                    <a:pt x="5944669" y="1146737"/>
-                  </a:lnTo>
-                  <a:lnTo>
-                    <a:pt x="6016292" y="1153512"/>
-                  </a:lnTo>
-                  <a:lnTo>
-                    <a:pt x="6087914" y="1160184"/>
-                  </a:lnTo>
-                  <a:lnTo>
-                    <a:pt x="6159537" y="1166753"/>
-                  </a:lnTo>
-                  <a:lnTo>
-                    <a:pt x="6231159" y="1173223"/>
-                  </a:lnTo>
-                  <a:lnTo>
-                    <a:pt x="6302782" y="1179594"/>
-                  </a:lnTo>
-                  <a:lnTo>
-                    <a:pt x="6374404" y="1185867"/>
-                  </a:lnTo>
-                  <a:lnTo>
-                    <a:pt x="6446027" y="1192045"/>
-                  </a:lnTo>
-                  <a:lnTo>
-                    <a:pt x="6517649" y="1198129"/>
-                  </a:lnTo>
-                  <a:lnTo>
-                    <a:pt x="6589272" y="1204120"/>
-                  </a:lnTo>
-                  <a:lnTo>
-                    <a:pt x="6660894" y="1210019"/>
-                  </a:lnTo>
-                  <a:lnTo>
-                    <a:pt x="6732517" y="1215828"/>
-                  </a:lnTo>
-                  <a:lnTo>
-                    <a:pt x="6804139" y="1221549"/>
-                  </a:lnTo>
-                  <a:lnTo>
-                    <a:pt x="6875762" y="1227183"/>
-                  </a:lnTo>
-                  <a:lnTo>
-                    <a:pt x="6947385" y="1232730"/>
-                  </a:lnTo>
-                  <a:lnTo>
-                    <a:pt x="7019007" y="1238193"/>
-                  </a:lnTo>
-                  <a:lnTo>
-                    <a:pt x="7090630" y="1243573"/>
+                    <a:pt x="71622" y="24405"/>
+                  </a:lnTo>
+                  <a:lnTo>
+                    <a:pt x="143245" y="48437"/>
+                  </a:lnTo>
+                  <a:lnTo>
+                    <a:pt x="214867" y="72102"/>
+                  </a:lnTo>
+                  <a:lnTo>
+                    <a:pt x="286490" y="95404"/>
+                  </a:lnTo>
+                  <a:lnTo>
+                    <a:pt x="358112" y="118349"/>
+                  </a:lnTo>
+                  <a:lnTo>
+                    <a:pt x="429735" y="140943"/>
+                  </a:lnTo>
+                  <a:lnTo>
+                    <a:pt x="501357" y="163191"/>
+                  </a:lnTo>
+                  <a:lnTo>
+                    <a:pt x="572980" y="185099"/>
+                  </a:lnTo>
+                  <a:lnTo>
+                    <a:pt x="644602" y="206672"/>
+                  </a:lnTo>
+                  <a:lnTo>
+                    <a:pt x="716225" y="227914"/>
+                  </a:lnTo>
+                  <a:lnTo>
+                    <a:pt x="787847" y="248831"/>
+                  </a:lnTo>
+                  <a:lnTo>
+                    <a:pt x="859470" y="269427"/>
+                  </a:lnTo>
+                  <a:lnTo>
+                    <a:pt x="931092" y="289709"/>
+                  </a:lnTo>
+                  <a:lnTo>
+                    <a:pt x="1002715" y="309680"/>
+                  </a:lnTo>
+                  <a:lnTo>
+                    <a:pt x="1074337" y="329345"/>
+                  </a:lnTo>
+                  <a:lnTo>
+                    <a:pt x="1145960" y="348709"/>
+                  </a:lnTo>
+                  <a:lnTo>
+                    <a:pt x="1217582" y="367777"/>
+                  </a:lnTo>
+                  <a:lnTo>
+                    <a:pt x="1289205" y="386553"/>
+                  </a:lnTo>
+                  <a:lnTo>
+                    <a:pt x="1360827" y="405042"/>
+                  </a:lnTo>
+                  <a:lnTo>
+                    <a:pt x="1432450" y="423247"/>
+                  </a:lnTo>
+                  <a:lnTo>
+                    <a:pt x="1504073" y="441174"/>
+                  </a:lnTo>
+                  <a:lnTo>
+                    <a:pt x="1575695" y="458827"/>
+                  </a:lnTo>
+                  <a:lnTo>
+                    <a:pt x="1647318" y="476209"/>
+                  </a:lnTo>
+                  <a:lnTo>
+                    <a:pt x="1718940" y="493325"/>
+                  </a:lnTo>
+                  <a:lnTo>
+                    <a:pt x="1790563" y="510179"/>
+                  </a:lnTo>
+                  <a:lnTo>
+                    <a:pt x="1862185" y="526775"/>
+                  </a:lnTo>
+                  <a:lnTo>
+                    <a:pt x="1933808" y="543117"/>
+                  </a:lnTo>
+                  <a:lnTo>
+                    <a:pt x="2005430" y="559209"/>
+                  </a:lnTo>
+                  <a:lnTo>
+                    <a:pt x="2077053" y="575055"/>
+                  </a:lnTo>
+                  <a:lnTo>
+                    <a:pt x="2148675" y="590658"/>
+                  </a:lnTo>
+                  <a:lnTo>
+                    <a:pt x="2220298" y="606022"/>
+                  </a:lnTo>
+                  <a:lnTo>
+                    <a:pt x="2291920" y="621151"/>
+                  </a:lnTo>
+                  <a:lnTo>
+                    <a:pt x="2363543" y="636048"/>
+                  </a:lnTo>
+                  <a:lnTo>
+                    <a:pt x="2435165" y="650718"/>
+                  </a:lnTo>
+                  <a:lnTo>
+                    <a:pt x="2506788" y="665163"/>
+                  </a:lnTo>
+                  <a:lnTo>
+                    <a:pt x="2578410" y="679386"/>
+                  </a:lnTo>
+                  <a:lnTo>
+                    <a:pt x="2650033" y="693392"/>
+                  </a:lnTo>
+                  <a:lnTo>
+                    <a:pt x="2721655" y="707184"/>
+                  </a:lnTo>
+                  <a:lnTo>
+                    <a:pt x="2793278" y="720764"/>
+                  </a:lnTo>
+                  <a:lnTo>
+                    <a:pt x="2864901" y="734137"/>
+                  </a:lnTo>
+                  <a:lnTo>
+                    <a:pt x="2936523" y="747305"/>
+                  </a:lnTo>
+                  <a:lnTo>
+                    <a:pt x="3008146" y="760271"/>
+                  </a:lnTo>
+                  <a:lnTo>
+                    <a:pt x="3079768" y="773039"/>
+                  </a:lnTo>
+                  <a:lnTo>
+                    <a:pt x="3151391" y="785611"/>
+                  </a:lnTo>
+                  <a:lnTo>
+                    <a:pt x="3223013" y="797991"/>
+                  </a:lnTo>
+                  <a:lnTo>
+                    <a:pt x="3294636" y="810181"/>
+                  </a:lnTo>
+                  <a:lnTo>
+                    <a:pt x="3366258" y="822185"/>
+                  </a:lnTo>
+                  <a:lnTo>
+                    <a:pt x="3437881" y="834005"/>
+                  </a:lnTo>
+                  <a:lnTo>
+                    <a:pt x="3509503" y="845644"/>
+                  </a:lnTo>
+                  <a:lnTo>
+                    <a:pt x="3581126" y="857105"/>
+                  </a:lnTo>
+                  <a:lnTo>
+                    <a:pt x="3652748" y="868391"/>
+                  </a:lnTo>
+                  <a:lnTo>
+                    <a:pt x="3724371" y="879504"/>
+                  </a:lnTo>
+                  <a:lnTo>
+                    <a:pt x="3795993" y="890446"/>
+                  </a:lnTo>
+                  <a:lnTo>
+                    <a:pt x="3867616" y="901221"/>
+                  </a:lnTo>
+                  <a:lnTo>
+                    <a:pt x="3939238" y="911832"/>
+                  </a:lnTo>
+                  <a:lnTo>
+                    <a:pt x="4010861" y="922279"/>
+                  </a:lnTo>
+                  <a:lnTo>
+                    <a:pt x="4082483" y="932567"/>
+                  </a:lnTo>
+                  <a:lnTo>
+                    <a:pt x="4154106" y="942698"/>
+                  </a:lnTo>
+                  <a:lnTo>
+                    <a:pt x="4225729" y="952673"/>
+                  </a:lnTo>
+                  <a:lnTo>
+                    <a:pt x="4297351" y="962496"/>
+                  </a:lnTo>
+                  <a:lnTo>
+                    <a:pt x="4368974" y="972168"/>
+                  </a:lnTo>
+                  <a:lnTo>
+                    <a:pt x="4440596" y="981692"/>
+                  </a:lnTo>
+                  <a:lnTo>
+                    <a:pt x="4512219" y="991070"/>
+                  </a:lnTo>
+                  <a:lnTo>
+                    <a:pt x="4583841" y="1000305"/>
+                  </a:lnTo>
+                  <a:lnTo>
+                    <a:pt x="4655464" y="1009399"/>
+                  </a:lnTo>
+                  <a:lnTo>
+                    <a:pt x="4727086" y="1018353"/>
+                  </a:lnTo>
+                  <a:lnTo>
+                    <a:pt x="4798709" y="1027170"/>
+                  </a:lnTo>
+                  <a:lnTo>
+                    <a:pt x="4870331" y="1035852"/>
+                  </a:lnTo>
+                  <a:lnTo>
+                    <a:pt x="4941954" y="1044402"/>
+                  </a:lnTo>
+                  <a:lnTo>
+                    <a:pt x="5013576" y="1052820"/>
+                  </a:lnTo>
+                  <a:lnTo>
+                    <a:pt x="5085199" y="1061110"/>
+                  </a:lnTo>
+                  <a:lnTo>
+                    <a:pt x="5156821" y="1069272"/>
+                  </a:lnTo>
+                  <a:lnTo>
+                    <a:pt x="5228444" y="1077310"/>
+                  </a:lnTo>
+                  <a:lnTo>
+                    <a:pt x="5300066" y="1085225"/>
+                  </a:lnTo>
+                  <a:lnTo>
+                    <a:pt x="5371689" y="1093018"/>
+                  </a:lnTo>
+                  <a:lnTo>
+                    <a:pt x="5443311" y="1100693"/>
+                  </a:lnTo>
+                  <a:lnTo>
+                    <a:pt x="5514934" y="1108249"/>
+                  </a:lnTo>
+                  <a:lnTo>
+                    <a:pt x="5586557" y="1115690"/>
+                  </a:lnTo>
+                  <a:lnTo>
+                    <a:pt x="5658179" y="1123018"/>
+                  </a:lnTo>
+                  <a:lnTo>
+                    <a:pt x="5729802" y="1130233"/>
+                  </a:lnTo>
+                  <a:lnTo>
+                    <a:pt x="5801424" y="1137337"/>
+                  </a:lnTo>
+                  <a:lnTo>
+                    <a:pt x="5873047" y="1144333"/>
+                  </a:lnTo>
+                  <a:lnTo>
+                    <a:pt x="5944669" y="1151222"/>
+                  </a:lnTo>
+                  <a:lnTo>
+                    <a:pt x="6016292" y="1158005"/>
+                  </a:lnTo>
+                  <a:lnTo>
+                    <a:pt x="6087914" y="1164684"/>
+                  </a:lnTo>
+                  <a:lnTo>
+                    <a:pt x="6159537" y="1171262"/>
+                  </a:lnTo>
+                  <a:lnTo>
+                    <a:pt x="6231159" y="1177738"/>
+                  </a:lnTo>
+                  <a:lnTo>
+                    <a:pt x="6302782" y="1184116"/>
+                  </a:lnTo>
+                  <a:lnTo>
+                    <a:pt x="6374404" y="1190395"/>
+                  </a:lnTo>
+                  <a:lnTo>
+                    <a:pt x="6446027" y="1196579"/>
+                  </a:lnTo>
+                  <a:lnTo>
+                    <a:pt x="6517649" y="1202668"/>
+                  </a:lnTo>
+                  <a:lnTo>
+                    <a:pt x="6589272" y="1208664"/>
+                  </a:lnTo>
+                  <a:lnTo>
+                    <a:pt x="6660894" y="1214568"/>
+                  </a:lnTo>
+                  <a:lnTo>
+                    <a:pt x="6732517" y="1220381"/>
+                  </a:lnTo>
+                  <a:lnTo>
+                    <a:pt x="6804139" y="1226106"/>
+                  </a:lnTo>
+                  <a:lnTo>
+                    <a:pt x="6875762" y="1231743"/>
+                  </a:lnTo>
+                  <a:lnTo>
+                    <a:pt x="6947385" y="1237294"/>
+                  </a:lnTo>
+                  <a:lnTo>
+                    <a:pt x="7019007" y="1242759"/>
+                  </a:lnTo>
+                  <a:lnTo>
+                    <a:pt x="7090630" y="1248141"/>
                   </a:lnTo>
                 </a:path>
               </a:pathLst>
